--- a/deck/10pourcent_report.pptx
+++ b/deck/10pourcent_report.pptx
@@ -123,19 +123,19 @@
           <a:lstStyle/>
           <a:p>
             <a:pPr>
-              <a:defRPr sz="1200" b="0" i="0" u="none" strike="noStrike">
-                <a:solidFill>
-                  <a:srgbClr val="1B1B2F"/>
-                </a:solidFill>
-                <a:latin typeface="Calibri"/>
+              <a:defRPr sz="1100" b="0" i="0" u="none" strike="noStrike">
+                <a:solidFill>
+                  <a:srgbClr val="000000"/>
+                </a:solidFill>
+                <a:latin typeface="Poppins"/>
               </a:defRPr>
             </a:pPr>
             <a:r>
-              <a:rPr sz="1200" b="0" i="0" u="none" strike="noStrike">
-                <a:solidFill>
-                  <a:srgbClr val="1B1B2F"/>
-                </a:solidFill>
-                <a:latin typeface="Calibri"/>
+              <a:rPr sz="1100" b="0" i="0" u="none" strike="noStrike">
+                <a:solidFill>
+                  <a:srgbClr val="000000"/>
+                </a:solidFill>
+                <a:latin typeface="Poppins"/>
               </a:rPr>
               <a:t>Pubs actives, par semaine de lancement</a:t>
             </a:r>
@@ -168,7 +168,7 @@
           </c:tx>
           <c:spPr>
             <a:solidFill>
-              <a:srgbClr val="EF4B4B"/>
+              <a:srgbClr val="A4193D"/>
             </a:solidFill>
             <a:effectLst/>
           </c:spPr>
@@ -281,7 +281,7 @@
           </c:tx>
           <c:spPr>
             <a:solidFill>
-              <a:srgbClr val="5B5BD6"/>
+              <a:srgbClr val="005B96"/>
             </a:solidFill>
             <a:effectLst/>
           </c:spPr>
@@ -394,7 +394,7 @@
           </c:tx>
           <c:spPr>
             <a:solidFill>
-              <a:srgbClr val="0E9E8C"/>
+              <a:srgbClr val="BA7A12"/>
             </a:solidFill>
             <a:effectLst/>
           </c:spPr>
@@ -546,11 +546,11 @@
           <a:lstStyle/>
           <a:p>
             <a:pPr>
-              <a:defRPr sz="900" b="0" i="0" u="none" strike="noStrike">
-                <a:solidFill>
-                  <a:srgbClr val="5A5A6E"/>
-                </a:solidFill>
-                <a:latin typeface="Calibri"/>
+              <a:defRPr sz="800" b="0" i="0" u="none" strike="noStrike">
+                <a:solidFill>
+                  <a:srgbClr val="333132"/>
+                </a:solidFill>
+                <a:latin typeface="Poppins"/>
               </a:defRPr>
             </a:pPr>
             <a:endParaRPr lang="en-US"/>
@@ -573,7 +573,7 @@
           <c:spPr>
             <a:ln w="9525" cap="flat">
               <a:solidFill>
-                <a:srgbClr val="E4E4EA"/>
+                <a:srgbClr val="E6E4DA"/>
               </a:solidFill>
               <a:prstDash val="solid"/>
               <a:round/>
@@ -598,11 +598,11 @@
           <a:lstStyle/>
           <a:p>
             <a:pPr>
-              <a:defRPr sz="900" b="0" i="0" u="none" strike="noStrike">
-                <a:solidFill>
-                  <a:srgbClr val="5A5A6E"/>
-                </a:solidFill>
-                <a:latin typeface="Calibri"/>
+              <a:defRPr sz="800" b="0" i="0" u="none" strike="noStrike">
+                <a:solidFill>
+                  <a:srgbClr val="333132"/>
+                </a:solidFill>
+                <a:latin typeface="Poppins"/>
               </a:defRPr>
             </a:pPr>
             <a:endParaRPr lang="en-US"/>
@@ -628,12 +628,12 @@
         <a:lstStyle/>
         <a:p>
           <a:pPr>
-            <a:defRPr sz="1100">
+            <a:defRPr sz="1000">
               <a:solidFill>
-                <a:srgbClr val="1B1B2F"/>
+                <a:srgbClr val="000000"/>
               </a:solidFill>
-              <a:latin typeface="Calibri"/>
-              <a:cs typeface="Calibri"/>
+              <a:latin typeface="Poppins"/>
+              <a:cs typeface="Poppins"/>
             </a:defRPr>
           </a:pPr>
           <a:endParaRPr lang="en-US"/>
@@ -668,19 +668,19 @@
           <a:lstStyle/>
           <a:p>
             <a:pPr>
-              <a:defRPr sz="1100" b="0" i="0" u="none" strike="noStrike">
-                <a:solidFill>
-                  <a:srgbClr val="1B1B2F"/>
-                </a:solidFill>
-                <a:latin typeface="Calibri"/>
+              <a:defRPr sz="1000" b="0" i="0" u="none" strike="noStrike">
+                <a:solidFill>
+                  <a:srgbClr val="000000"/>
+                </a:solidFill>
+                <a:latin typeface="Poppins"/>
               </a:defRPr>
             </a:pPr>
             <a:r>
-              <a:rPr sz="1100" b="0" i="0" u="none" strike="noStrike">
-                <a:solidFill>
-                  <a:srgbClr val="1B1B2F"/>
-                </a:solidFill>
-                <a:latin typeface="Calibri"/>
+              <a:rPr sz="1000" b="0" i="0" u="none" strike="noStrike">
+                <a:solidFill>
+                  <a:srgbClr val="000000"/>
+                </a:solidFill>
+                <a:latin typeface="Poppins"/>
               </a:rPr>
               <a:t>% des pubs qui présentent l'appli (solution-aware)</a:t>
             </a:r>
@@ -713,7 +713,7 @@
           </c:tx>
           <c:spPr>
             <a:solidFill>
-              <a:srgbClr val="EF4B4B"/>
+              <a:srgbClr val="A4193D"/>
             </a:solidFill>
             <a:effectLst/>
           </c:spPr>
@@ -727,9 +727,9 @@
                 <a:pPr>
                   <a:defRPr b="1" i="0" strike="noStrike" sz="1200" u="none">
                     <a:solidFill>
-                      <a:srgbClr val="1B1B2F"/>
+                      <a:srgbClr val="000000"/>
                     </a:solidFill>
-                    <a:latin typeface="Calibri"/>
+                    <a:latin typeface="Poppins"/>
                   </a:defRPr>
                 </a:pPr>
               </a:p>
@@ -748,7 +748,7 @@
             <c:bubble3D val="0"/>
             <c:spPr>
               <a:solidFill>
-                <a:srgbClr val="EF4B4B"/>
+                <a:srgbClr val="A4193D"/>
               </a:solidFill>
               <a:effectLst/>
             </c:spPr>
@@ -759,7 +759,7 @@
             <c:bubble3D val="0"/>
             <c:spPr>
               <a:solidFill>
-                <a:srgbClr val="5B5BD6"/>
+                <a:srgbClr val="005B96"/>
               </a:solidFill>
               <a:effectLst/>
             </c:spPr>
@@ -770,7 +770,7 @@
             <c:bubble3D val="0"/>
             <c:spPr>
               <a:solidFill>
-                <a:srgbClr val="0E9E8C"/>
+                <a:srgbClr val="BA7A12"/>
               </a:solidFill>
               <a:effectLst/>
             </c:spPr>
@@ -822,9 +822,9 @@
               <a:pPr>
                 <a:defRPr b="1" i="0" strike="noStrike" sz="1200" u="none">
                   <a:solidFill>
-                    <a:srgbClr val="1B1B2F"/>
+                    <a:srgbClr val="000000"/>
                   </a:solidFill>
-                  <a:latin typeface="Calibri"/>
+                  <a:latin typeface="Poppins"/>
                 </a:defRPr>
               </a:pPr>
             </a:p>
@@ -868,11 +868,11 @@
           <a:lstStyle/>
           <a:p>
             <a:pPr>
-              <a:defRPr sz="1200" b="0" i="0" u="none" strike="noStrike">
-                <a:solidFill>
-                  <a:srgbClr val="1B1B2F"/>
-                </a:solidFill>
-                <a:latin typeface="Calibri"/>
+              <a:defRPr sz="1100" b="0" i="0" u="none" strike="noStrike">
+                <a:solidFill>
+                  <a:srgbClr val="000000"/>
+                </a:solidFill>
+                <a:latin typeface="Poppins"/>
               </a:defRPr>
             </a:pPr>
             <a:endParaRPr lang="en-US"/>
@@ -888,7 +888,7 @@
         <c:axId val="2094734552"/>
         <c:scaling>
           <c:orientation val="minMax"/>
-          <c:max val="110"/>
+          <c:max val="115"/>
           <c:min val="0"/>
         </c:scaling>
         <c:delete val="1"/>
@@ -2051,7 +2051,7 @@
     <p:bg>
       <p:bgPr>
         <a:solidFill>
-          <a:srgbClr val="FFD93D"/>
+          <a:srgbClr val="FAF9EF"/>
         </a:solidFill>
       </p:bgPr>
     </p:bg>
@@ -2071,53 +2071,14 @@
       </p:grpSpPr>
       <p:sp>
         <p:nvSpPr>
-          <p:cNvPr id="2" name="Text 0"/>
-          <p:cNvSpPr txBox="1"/>
-          <p:nvPr/>
-        </p:nvSpPr>
-        <p:spPr>
-          <a:xfrm>
-            <a:off x="457200" y="822960"/>
-            <a:ext cx="6035040" cy="1737360"/>
-          </a:xfrm>
-          <a:prstGeom prst="rect">
-            <a:avLst/>
-          </a:prstGeom>
-          <a:noFill/>
-          <a:ln/>
-        </p:spPr>
-        <p:txBody>
-          <a:bodyPr wrap="square" lIns="0" tIns="0" rIns="0" bIns="0" rtlCol="0" anchor="t"/>
-          <a:lstStyle/>
-          <a:p>
-            <a:pPr indent="0" marL="0">
-              <a:buNone/>
-            </a:pPr>
-            <a:r>
-              <a:rPr lang="en-US" sz="4400" b="1" dirty="0">
-                <a:solidFill>
-                  <a:srgbClr val="1B1B2F"/>
-                </a:solidFill>
-                <a:latin typeface="Bookman Old Style" pitchFamily="34" charset="0"/>
-                <a:ea typeface="Bookman Old Style" pitchFamily="34" charset="-122"/>
-                <a:cs typeface="Bookman Old Style" pitchFamily="34" charset="-120"/>
-              </a:rPr>
-              <a:t>the report you never asked for</a:t>
-            </a:r>
-            <a:endParaRPr lang="en-US" sz="4400" dirty="0"/>
-          </a:p>
-        </p:txBody>
-      </p:sp>
-      <p:sp>
-        <p:nvSpPr>
-          <p:cNvPr id="3" name="Text 1"/>
-          <p:cNvSpPr txBox="1"/>
-          <p:nvPr/>
-        </p:nvSpPr>
-        <p:spPr>
-          <a:xfrm>
-            <a:off x="6126480" y="502920"/>
-            <a:ext cx="2560320" cy="1005840"/>
+          <p:cNvPr id="2" name="Shape 0"/>
+          <p:cNvSpPr/>
+          <p:nvPr/>
+        </p:nvSpPr>
+        <p:spPr>
+          <a:xfrm>
+            <a:off x="320040" y="365760"/>
+            <a:ext cx="6309360" cy="4434840"/>
           </a:xfrm>
           <a:prstGeom prst="rect">
             <a:avLst/>
@@ -2125,124 +2086,24 @@
           <a:solidFill>
             <a:srgbClr val="FFFFFF"/>
           </a:solidFill>
-          <a:ln w="31750">
+          <a:ln w="50800">
             <a:solidFill>
-              <a:srgbClr val="1B1B2F"/>
-            </a:solidFill>
-          </a:ln>
-          <a:effectLst>
-            <a:outerShdw sx="100000" sy="100000" kx="0" ky="0" algn="bl" rotWithShape="0" blurRad="101600" dist="63500" dir="2700000">
-              <a:srgbClr val="1B1B2F">
-                <a:alpha val="100000"/>
-              </a:srgbClr>
-            </a:outerShdw>
-          </a:effectLst>
-        </p:spPr>
-        <p:txBody>
-          <a:bodyPr wrap="square" lIns="101600" tIns="101600" rIns="101600" bIns="101600" rtlCol="0" anchor="ctr"/>
-          <a:lstStyle/>
-          <a:p>
-            <a:pPr algn="ctr" indent="0" marL="0">
-              <a:buNone/>
-            </a:pPr>
-            <a:r>
-              <a:rPr lang="en-US" sz="2000" b="1" dirty="0">
-                <a:solidFill>
-                  <a:srgbClr val="1B1B2F"/>
-                </a:solidFill>
-                <a:latin typeface="Calibri" pitchFamily="34" charset="0"/>
-                <a:ea typeface="Calibri" pitchFamily="34" charset="-122"/>
-                <a:cs typeface="Calibri" pitchFamily="34" charset="-120"/>
-              </a:rPr>
-              <a:t>…but pls read it</a:t>
-            </a:r>
-            <a:endParaRPr lang="en-US" sz="2000" dirty="0"/>
-          </a:p>
-        </p:txBody>
-      </p:sp>
-      <p:sp>
-        <p:nvSpPr>
-          <p:cNvPr id="4" name="Text 2"/>
-          <p:cNvSpPr txBox="1"/>
-          <p:nvPr/>
-        </p:nvSpPr>
-        <p:spPr>
-          <a:xfrm>
-            <a:off x="457200" y="2606040"/>
-            <a:ext cx="5669280" cy="548640"/>
-          </a:xfrm>
-          <a:prstGeom prst="rect">
-            <a:avLst/>
-          </a:prstGeom>
-          <a:noFill/>
-          <a:ln/>
-        </p:spPr>
-        <p:txBody>
-          <a:bodyPr wrap="square" lIns="0" tIns="0" rIns="0" bIns="0" rtlCol="0" anchor="ctr"/>
-          <a:lstStyle/>
-          <a:p>
-            <a:pPr indent="0" marL="0">
-              <a:buNone/>
-            </a:pPr>
-            <a:r>
-              <a:rPr lang="en-US" sz="1700" i="1" dirty="0">
-                <a:solidFill>
-                  <a:srgbClr val="1B1B2F"/>
-                </a:solidFill>
-                <a:latin typeface="Calibri" pitchFamily="34" charset="0"/>
-                <a:ea typeface="Calibri" pitchFamily="34" charset="-122"/>
-                <a:cs typeface="Calibri" pitchFamily="34" charset="-120"/>
-              </a:rPr>
-              <a:t>some insights from 10%, Joko &amp; Ibotta, scrapées le 30 septembre 2026</a:t>
-            </a:r>
-            <a:endParaRPr lang="en-US" sz="1700" dirty="0"/>
-          </a:p>
-        </p:txBody>
-      </p:sp>
-      <p:sp>
-        <p:nvSpPr>
-          <p:cNvPr id="5" name="Shape 3"/>
-          <p:cNvSpPr/>
-          <p:nvPr/>
-        </p:nvSpPr>
-        <p:spPr>
-          <a:xfrm>
-            <a:off x="457200" y="3429000"/>
-            <a:ext cx="5669280" cy="1143000"/>
-          </a:xfrm>
-          <a:prstGeom prst="roundRect">
-            <a:avLst>
-              <a:gd name="adj" fmla="val 12000"/>
-            </a:avLst>
-          </a:prstGeom>
-          <a:solidFill>
-            <a:srgbClr val="FFFFFF"/>
-          </a:solidFill>
-          <a:ln w="31750">
-            <a:solidFill>
-              <a:srgbClr val="1B1B2F"/>
+              <a:srgbClr val="000000"/>
             </a:solidFill>
             <a:prstDash val="solid"/>
           </a:ln>
-          <a:effectLst>
-            <a:outerShdw sx="100000" sy="100000" kx="0" ky="0" algn="bl" rotWithShape="0" blurRad="101600" dist="63500" dir="2700000">
-              <a:srgbClr val="1B1B2F">
-                <a:alpha val="100000"/>
-              </a:srgbClr>
-            </a:outerShdw>
-          </a:effectLst>
-        </p:spPr>
-      </p:sp>
-      <p:sp>
-        <p:nvSpPr>
-          <p:cNvPr id="6" name="Text 4"/>
+        </p:spPr>
+      </p:sp>
+      <p:sp>
+        <p:nvSpPr>
+          <p:cNvPr id="3" name="Text 1"/>
           <p:cNvSpPr txBox="1"/>
           <p:nvPr/>
         </p:nvSpPr>
         <p:spPr>
           <a:xfrm>
-            <a:off x="640080" y="3474720"/>
-            <a:ext cx="5303520" cy="1051560"/>
+            <a:off x="640080" y="685800"/>
+            <a:ext cx="5669280" cy="1188720"/>
           </a:xfrm>
           <a:prstGeom prst="rect">
             <a:avLst/>
@@ -2254,59 +2115,66 @@
           <a:bodyPr wrap="square" lIns="0" tIns="0" rIns="0" bIns="0" rtlCol="0" anchor="ctr"/>
           <a:lstStyle/>
           <a:p>
-            <a:pPr indent="0" marL="0">
+            <a:pPr algn="ctr" indent="0" marL="0">
               <a:buNone/>
             </a:pPr>
             <a:r>
-              <a:rPr lang="en-US" sz="1400" dirty="0">
-                <a:solidFill>
-                  <a:srgbClr val="1B1B2F"/>
-                </a:solidFill>
-                <a:latin typeface="Calibri" pitchFamily="34" charset="0"/>
-                <a:ea typeface="Calibri" pitchFamily="34" charset="-122"/>
-                <a:cs typeface="Calibri" pitchFamily="34" charset="-120"/>
-              </a:rPr>
-              <a:t>J'ai récupéré toutes les pubs actives de 10%, Joko et Ibotta, soit 335 pubs. J'ai transcrit les vidéos et classé chaque pub par hook, angle, niveau de conscience et format.</a:t>
-            </a:r>
-            <a:endParaRPr lang="en-US" sz="1400" dirty="0"/>
-          </a:p>
-        </p:txBody>
-      </p:sp>
-      <p:sp>
-        <p:nvSpPr>
-          <p:cNvPr id="7" name="Shape 5"/>
-          <p:cNvSpPr/>
-          <p:nvPr/>
-        </p:nvSpPr>
-        <p:spPr>
-          <a:xfrm>
-            <a:off x="6720840" y="2103120"/>
-            <a:ext cx="1920240" cy="1920240"/>
-          </a:xfrm>
-          <a:prstGeom prst="ellipse">
-            <a:avLst/>
-          </a:prstGeom>
-          <a:solidFill>
-            <a:srgbClr val="FFFFFF"/>
-          </a:solidFill>
-          <a:ln w="38100">
-            <a:solidFill>
-              <a:srgbClr val="1B1B2F"/>
-            </a:solidFill>
-            <a:prstDash val="solid"/>
-          </a:ln>
-          <a:effectLst>
-            <a:outerShdw sx="100000" sy="100000" kx="0" ky="0" algn="bl" rotWithShape="0" blurRad="101600" dist="63500" dir="2700000">
-              <a:srgbClr val="1B1B2F">
-                <a:alpha val="100000"/>
-              </a:srgbClr>
-            </a:outerShdw>
-          </a:effectLst>
-        </p:spPr>
+              <a:rPr lang="en-US" sz="3000" b="1" i="1" dirty="0">
+                <a:solidFill>
+                  <a:srgbClr val="000000"/>
+                </a:solidFill>
+                <a:latin typeface="Fraunces" pitchFamily="34" charset="0"/>
+                <a:ea typeface="Fraunces" pitchFamily="34" charset="-122"/>
+                <a:cs typeface="Fraunces" pitchFamily="34" charset="-120"/>
+              </a:rPr>
+              <a:t>the report you never asked for</a:t>
+            </a:r>
+            <a:endParaRPr lang="en-US" sz="3000" dirty="0"/>
+          </a:p>
+        </p:txBody>
+      </p:sp>
+      <p:sp>
+        <p:nvSpPr>
+          <p:cNvPr id="4" name="Text 2"/>
+          <p:cNvSpPr txBox="1"/>
+          <p:nvPr/>
+        </p:nvSpPr>
+        <p:spPr>
+          <a:xfrm>
+            <a:off x="640080" y="1828800"/>
+            <a:ext cx="5669280" cy="502920"/>
+          </a:xfrm>
+          <a:prstGeom prst="rect">
+            <a:avLst/>
+          </a:prstGeom>
+          <a:noFill/>
+          <a:ln/>
+        </p:spPr>
+        <p:txBody>
+          <a:bodyPr wrap="square" lIns="0" tIns="0" rIns="0" bIns="0" rtlCol="0" anchor="ctr"/>
+          <a:lstStyle/>
+          <a:p>
+            <a:pPr algn="ctr" indent="0" marL="0">
+              <a:buNone/>
+            </a:pPr>
+            <a:r>
+              <a:rPr lang="en-US" sz="2400" dirty="0">
+                <a:solidFill>
+                  <a:srgbClr val="A4193D"/>
+                </a:solidFill>
+                <a:latin typeface="Architects Daughter" pitchFamily="34" charset="0"/>
+                <a:ea typeface="Architects Daughter" pitchFamily="34" charset="-122"/>
+                <a:cs typeface="Architects Daughter" pitchFamily="34" charset="-120"/>
+              </a:rPr>
+              <a:t>…but pls read it</a:t>
+            </a:r>
+            <a:endParaRPr lang="en-US" sz="2400" dirty="0"/>
+          </a:p>
+        </p:txBody>
       </p:sp>
       <p:pic>
         <p:nvPicPr>
-          <p:cNvPr id="8" name="Image 0" descr="preencoded.png">    </p:cNvPr>
+          <p:cNvPr id="5" name="Image 0" descr="/tmp/claude-0/-home-user-meta-ads---10-pourcent/a8c37ddd-b273-55c4-b52d-d5d00ba8e18a/scratchpad/deck/img/image6.png">    </p:cNvPr>
           <p:cNvPicPr>
             <a:picLocks noChangeAspect="1"/>
           </p:cNvPicPr>
@@ -2320,8 +2188,8 @@
         </p:blipFill>
         <p:spPr>
           <a:xfrm>
-            <a:off x="7178040" y="2560320"/>
-            <a:ext cx="1005840" cy="1005840"/>
+            <a:off x="731520" y="2606040"/>
+            <a:ext cx="347472" cy="347472"/>
           </a:xfrm>
           <a:prstGeom prst="rect">
             <a:avLst/>
@@ -2330,145 +2198,130 @@
       </p:pic>
       <p:sp>
         <p:nvSpPr>
-          <p:cNvPr id="9" name="Text 6"/>
+          <p:cNvPr id="6" name="Text 3"/>
           <p:cNvSpPr txBox="1"/>
           <p:nvPr/>
         </p:nvSpPr>
         <p:spPr>
           <a:xfrm>
-            <a:off x="6400800" y="4251960"/>
-            <a:ext cx="777240" cy="365760"/>
-          </a:xfrm>
-          <a:prstGeom prst="roundRect">
-            <a:avLst>
-              <a:gd name="adj" fmla="val 37500"/>
-            </a:avLst>
-          </a:prstGeom>
-          <a:solidFill>
-            <a:srgbClr val="EF4B4B"/>
-          </a:solidFill>
-          <a:ln w="25400">
-            <a:solidFill>
-              <a:srgbClr val="1B1B2F"/>
-            </a:solidFill>
-          </a:ln>
+            <a:off x="1234440" y="2578608"/>
+            <a:ext cx="5120640" cy="457200"/>
+          </a:xfrm>
+          <a:prstGeom prst="rect">
+            <a:avLst/>
+          </a:prstGeom>
+          <a:noFill/>
+          <a:ln/>
         </p:spPr>
         <p:txBody>
           <a:bodyPr wrap="square" lIns="0" tIns="0" rIns="0" bIns="0" rtlCol="0" anchor="ctr"/>
           <a:lstStyle/>
           <a:p>
-            <a:pPr algn="ctr" indent="0" marL="0">
+            <a:pPr algn="l" indent="0" marL="0">
               <a:buNone/>
             </a:pPr>
             <a:r>
-              <a:rPr lang="en-US" sz="1200" b="1" dirty="0">
-                <a:solidFill>
-                  <a:srgbClr val="FFFFFF"/>
-                </a:solidFill>
-                <a:latin typeface="Calibri" pitchFamily="34" charset="0"/>
-                <a:ea typeface="Calibri" pitchFamily="34" charset="-122"/>
-                <a:cs typeface="Calibri" pitchFamily="34" charset="-120"/>
-              </a:rPr>
-              <a:t>10%</a:t>
-            </a:r>
-            <a:endParaRPr lang="en-US" sz="1200" dirty="0"/>
-          </a:p>
-        </p:txBody>
-      </p:sp>
-      <p:sp>
-        <p:nvSpPr>
-          <p:cNvPr id="10" name="Text 7"/>
+              <a:rPr lang="en-US" sz="1300" b="1" i="1" dirty="0">
+                <a:solidFill>
+                  <a:srgbClr val="333132"/>
+                </a:solidFill>
+                <a:latin typeface="Poppins" pitchFamily="34" charset="0"/>
+                <a:ea typeface="Poppins" pitchFamily="34" charset="-122"/>
+                <a:cs typeface="Poppins" pitchFamily="34" charset="-120"/>
+              </a:rPr>
+              <a:t>some insights from 10%, Joko &amp; Ibotta, scrapées le 30 septembre 2026</a:t>
+            </a:r>
+            <a:endParaRPr lang="en-US" sz="1300" dirty="0"/>
+          </a:p>
+        </p:txBody>
+      </p:sp>
+      <p:pic>
+        <p:nvPicPr>
+          <p:cNvPr id="7" name="Image 1" descr="/tmp/claude-0/-home-user-meta-ads---10-pourcent/a8c37ddd-b273-55c4-b52d-d5d00ba8e18a/scratchpad/deck/img/image6.png">    </p:cNvPr>
+          <p:cNvPicPr>
+            <a:picLocks noChangeAspect="1"/>
+          </p:cNvPicPr>
+          <p:nvPr/>
+        </p:nvPicPr>
+        <p:blipFill>
+          <a:blip r:embed="rId2"/>
+          <a:stretch>
+            <a:fillRect/>
+          </a:stretch>
+        </p:blipFill>
+        <p:spPr>
+          <a:xfrm>
+            <a:off x="731520" y="3246120"/>
+            <a:ext cx="347472" cy="347472"/>
+          </a:xfrm>
+          <a:prstGeom prst="rect">
+            <a:avLst/>
+          </a:prstGeom>
+        </p:spPr>
+      </p:pic>
+      <p:sp>
+        <p:nvSpPr>
+          <p:cNvPr id="8" name="Text 4"/>
           <p:cNvSpPr txBox="1"/>
           <p:nvPr/>
         </p:nvSpPr>
         <p:spPr>
           <a:xfrm>
-            <a:off x="7269480" y="4251960"/>
-            <a:ext cx="777240" cy="365760"/>
-          </a:xfrm>
-          <a:prstGeom prst="roundRect">
-            <a:avLst>
-              <a:gd name="adj" fmla="val 37500"/>
-            </a:avLst>
-          </a:prstGeom>
-          <a:solidFill>
-            <a:srgbClr val="5B5BD6"/>
-          </a:solidFill>
-          <a:ln w="25400">
-            <a:solidFill>
-              <a:srgbClr val="1B1B2F"/>
-            </a:solidFill>
-          </a:ln>
-        </p:spPr>
-        <p:txBody>
-          <a:bodyPr wrap="square" lIns="0" tIns="0" rIns="0" bIns="0" rtlCol="0" anchor="ctr"/>
-          <a:lstStyle/>
-          <a:p>
-            <a:pPr algn="ctr" indent="0" marL="0">
+            <a:off x="1234440" y="3200400"/>
+            <a:ext cx="5120640" cy="1280160"/>
+          </a:xfrm>
+          <a:prstGeom prst="rect">
+            <a:avLst/>
+          </a:prstGeom>
+          <a:noFill/>
+          <a:ln/>
+        </p:spPr>
+        <p:txBody>
+          <a:bodyPr wrap="square" lIns="0" tIns="0" rIns="0" bIns="0" rtlCol="0" anchor="t"/>
+          <a:lstStyle/>
+          <a:p>
+            <a:pPr algn="l" indent="0" marL="0">
               <a:buNone/>
             </a:pPr>
             <a:r>
-              <a:rPr lang="en-US" sz="1200" b="1" dirty="0">
-                <a:solidFill>
-                  <a:srgbClr val="FFFFFF"/>
-                </a:solidFill>
-                <a:latin typeface="Calibri" pitchFamily="34" charset="0"/>
-                <a:ea typeface="Calibri" pitchFamily="34" charset="-122"/>
-                <a:cs typeface="Calibri" pitchFamily="34" charset="-120"/>
-              </a:rPr>
-              <a:t>Joko</a:t>
-            </a:r>
-            <a:endParaRPr lang="en-US" sz="1200" dirty="0"/>
-          </a:p>
-        </p:txBody>
-      </p:sp>
-      <p:sp>
-        <p:nvSpPr>
-          <p:cNvPr id="11" name="Text 8"/>
-          <p:cNvSpPr txBox="1"/>
-          <p:nvPr/>
-        </p:nvSpPr>
-        <p:spPr>
-          <a:xfrm>
-            <a:off x="8138160" y="4251960"/>
-            <a:ext cx="777240" cy="365760"/>
-          </a:xfrm>
-          <a:prstGeom prst="roundRect">
-            <a:avLst>
-              <a:gd name="adj" fmla="val 37500"/>
-            </a:avLst>
-          </a:prstGeom>
-          <a:solidFill>
-            <a:srgbClr val="0E9E8C"/>
-          </a:solidFill>
-          <a:ln w="25400">
-            <a:solidFill>
-              <a:srgbClr val="1B1B2F"/>
-            </a:solidFill>
-          </a:ln>
-        </p:spPr>
-        <p:txBody>
-          <a:bodyPr wrap="square" lIns="0" tIns="0" rIns="0" bIns="0" rtlCol="0" anchor="ctr"/>
-          <a:lstStyle/>
-          <a:p>
-            <a:pPr algn="ctr" indent="0" marL="0">
-              <a:buNone/>
-            </a:pPr>
-            <a:r>
-              <a:rPr lang="en-US" sz="1200" b="1" dirty="0">
-                <a:solidFill>
-                  <a:srgbClr val="FFFFFF"/>
-                </a:solidFill>
-                <a:latin typeface="Calibri" pitchFamily="34" charset="0"/>
-                <a:ea typeface="Calibri" pitchFamily="34" charset="-122"/>
-                <a:cs typeface="Calibri" pitchFamily="34" charset="-120"/>
-              </a:rPr>
-              <a:t>Ibotta</a:t>
-            </a:r>
-            <a:endParaRPr lang="en-US" sz="1200" dirty="0"/>
-          </a:p>
-        </p:txBody>
-      </p:sp>
+              <a:rPr lang="en-US" sz="1250" i="1" dirty="0">
+                <a:solidFill>
+                  <a:srgbClr val="333132"/>
+                </a:solidFill>
+                <a:latin typeface="Poppins" pitchFamily="34" charset="0"/>
+                <a:ea typeface="Poppins" pitchFamily="34" charset="-122"/>
+                <a:cs typeface="Poppins" pitchFamily="34" charset="-120"/>
+              </a:rPr>
+              <a:t>J'ai récupéré toutes les pubs actives de 10%, Joko et Ibotta, soit 335 pubs. J'ai transcrit les vidéos et classé chaque pub par hook, angle, niveau de conscience et format.</a:t>
+            </a:r>
+            <a:endParaRPr lang="en-US" sz="1250" dirty="0"/>
+          </a:p>
+        </p:txBody>
+      </p:sp>
+      <p:pic>
+        <p:nvPicPr>
+          <p:cNvPr id="9" name="Image 2" descr="/tmp/claude-0/-home-user-meta-ads---10-pourcent/a8c37ddd-b273-55c4-b52d-d5d00ba8e18a/scratchpad/deck/img/image3.png">    </p:cNvPr>
+          <p:cNvPicPr>
+            <a:picLocks noChangeAspect="1"/>
+          </p:cNvPicPr>
+          <p:nvPr/>
+        </p:nvPicPr>
+        <p:blipFill>
+          <a:blip r:embed="rId3"/>
+          <a:stretch>
+            <a:fillRect/>
+          </a:stretch>
+        </p:blipFill>
+        <p:spPr>
+          <a:xfrm>
+            <a:off x="5989320" y="1417320"/>
+            <a:ext cx="2880360" cy="3200400"/>
+          </a:xfrm>
+          <a:prstGeom prst="rect">
+            <a:avLst/>
+          </a:prstGeom>
+        </p:spPr>
+      </p:pic>
     </p:spTree>
   </p:cSld>
   <p:clrMapOvr>
@@ -2483,7 +2336,7 @@
     <p:bg>
       <p:bgPr>
         <a:solidFill>
-          <a:srgbClr val="FFFFFF"/>
+          <a:srgbClr val="FAF9EF"/>
         </a:solidFill>
       </p:bgPr>
     </p:bg>
@@ -2509,493 +2362,134 @@
         </p:nvSpPr>
         <p:spPr>
           <a:xfrm>
-            <a:off x="457200" y="320040"/>
-            <a:ext cx="502920" cy="502920"/>
+            <a:off x="320040" y="320040"/>
+            <a:ext cx="566928" cy="566928"/>
           </a:xfrm>
           <a:prstGeom prst="ellipse">
             <a:avLst/>
           </a:prstGeom>
           <a:solidFill>
-            <a:srgbClr val="EF4B4B"/>
+            <a:srgbClr val="F9C74F"/>
+          </a:solidFill>
+          <a:ln w="31750">
+            <a:solidFill>
+              <a:srgbClr val="000000"/>
+            </a:solidFill>
+            <a:prstDash val="solid"/>
+          </a:ln>
+        </p:spPr>
+      </p:sp>
+      <p:sp>
+        <p:nvSpPr>
+          <p:cNvPr id="3" name="Text 1"/>
+          <p:cNvSpPr txBox="1"/>
+          <p:nvPr/>
+        </p:nvSpPr>
+        <p:spPr>
+          <a:xfrm>
+            <a:off x="320040" y="320040"/>
+            <a:ext cx="566928" cy="566928"/>
+          </a:xfrm>
+          <a:prstGeom prst="rect">
+            <a:avLst/>
+          </a:prstGeom>
+          <a:noFill/>
+          <a:ln/>
+        </p:spPr>
+        <p:txBody>
+          <a:bodyPr wrap="square" lIns="0" tIns="0" rIns="0" bIns="0" rtlCol="0" anchor="ctr"/>
+          <a:lstStyle/>
+          <a:p>
+            <a:pPr algn="ctr" indent="0" marL="0">
+              <a:buNone/>
+            </a:pPr>
+            <a:r>
+              <a:rPr lang="en-US" sz="2400" dirty="0">
+                <a:solidFill>
+                  <a:srgbClr val="000000"/>
+                </a:solidFill>
+                <a:latin typeface="Architects Daughter" pitchFamily="34" charset="0"/>
+                <a:ea typeface="Architects Daughter" pitchFamily="34" charset="-122"/>
+                <a:cs typeface="Architects Daughter" pitchFamily="34" charset="-120"/>
+              </a:rPr>
+              <a:t>1</a:t>
+            </a:r>
+            <a:endParaRPr lang="en-US" sz="2400" dirty="0"/>
+          </a:p>
+        </p:txBody>
+      </p:sp>
+      <p:sp>
+        <p:nvSpPr>
+          <p:cNvPr id="4" name="Text 2"/>
+          <p:cNvSpPr txBox="1"/>
+          <p:nvPr/>
+        </p:nvSpPr>
+        <p:spPr>
+          <a:xfrm>
+            <a:off x="1051560" y="301752"/>
+            <a:ext cx="5852160" cy="603504"/>
+          </a:xfrm>
+          <a:prstGeom prst="roundRect">
+            <a:avLst>
+              <a:gd name="adj" fmla="val 18182"/>
+            </a:avLst>
+          </a:prstGeom>
+          <a:solidFill>
+            <a:srgbClr val="FFFFFF"/>
           </a:solidFill>
           <a:ln w="25400">
             <a:solidFill>
-              <a:srgbClr val="1B1B2F"/>
+              <a:srgbClr val="000000"/>
             </a:solidFill>
-            <a:prstDash val="solid"/>
-          </a:ln>
-        </p:spPr>
-      </p:sp>
-      <p:sp>
-        <p:nvSpPr>
-          <p:cNvPr id="3" name="Text 1"/>
-          <p:cNvSpPr txBox="1"/>
-          <p:nvPr/>
-        </p:nvSpPr>
-        <p:spPr>
-          <a:xfrm>
-            <a:off x="457200" y="320040"/>
-            <a:ext cx="502920" cy="502920"/>
-          </a:xfrm>
-          <a:prstGeom prst="rect">
-            <a:avLst/>
-          </a:prstGeom>
-          <a:noFill/>
-          <a:ln/>
-        </p:spPr>
-        <p:txBody>
-          <a:bodyPr wrap="square" lIns="0" tIns="0" rIns="0" bIns="0" rtlCol="0" anchor="ctr"/>
-          <a:lstStyle/>
-          <a:p>
-            <a:pPr algn="ctr" indent="0" marL="0">
-              <a:buNone/>
-            </a:pPr>
-            <a:r>
-              <a:rPr lang="en-US" sz="2000" b="1" dirty="0">
-                <a:solidFill>
-                  <a:srgbClr val="FFFFFF"/>
-                </a:solidFill>
-                <a:latin typeface="Bookman Old Style" pitchFamily="34" charset="0"/>
-                <a:ea typeface="Bookman Old Style" pitchFamily="34" charset="-122"/>
-                <a:cs typeface="Bookman Old Style" pitchFamily="34" charset="-120"/>
-              </a:rPr>
-              <a:t>1</a:t>
-            </a:r>
-            <a:endParaRPr lang="en-US" sz="2000" dirty="0"/>
-          </a:p>
-        </p:txBody>
-      </p:sp>
-      <p:sp>
-        <p:nvSpPr>
-          <p:cNvPr id="4" name="Text 2"/>
-          <p:cNvSpPr txBox="1"/>
-          <p:nvPr/>
-        </p:nvSpPr>
-        <p:spPr>
-          <a:xfrm>
-            <a:off x="1097280" y="320040"/>
-            <a:ext cx="7589520" cy="502920"/>
-          </a:xfrm>
-          <a:prstGeom prst="rect">
-            <a:avLst/>
-          </a:prstGeom>
-          <a:noFill/>
-          <a:ln/>
-        </p:spPr>
-        <p:txBody>
-          <a:bodyPr wrap="square" lIns="0" tIns="0" rIns="0" bIns="0" rtlCol="0" anchor="ctr"/>
-          <a:lstStyle/>
-          <a:p>
-            <a:pPr indent="0" marL="0">
-              <a:buNone/>
-            </a:pPr>
-            <a:r>
-              <a:rPr lang="en-US" sz="2300" b="1" dirty="0">
-                <a:solidFill>
-                  <a:srgbClr val="1B1B2F"/>
-                </a:solidFill>
-                <a:latin typeface="Bookman Old Style" pitchFamily="34" charset="0"/>
-                <a:ea typeface="Bookman Old Style" pitchFamily="34" charset="-122"/>
-                <a:cs typeface="Bookman Old Style" pitchFamily="34" charset="-120"/>
-              </a:rPr>
-              <a:t>Joko et Ibotta testent beaucoup plus vite</a:t>
-            </a:r>
-            <a:endParaRPr lang="en-US" sz="2300" dirty="0"/>
-          </a:p>
-        </p:txBody>
-      </p:sp>
-      <p:sp>
-        <p:nvSpPr>
-          <p:cNvPr id="5" name="Shape 3"/>
-          <p:cNvSpPr/>
-          <p:nvPr/>
-        </p:nvSpPr>
-        <p:spPr>
-          <a:xfrm>
-            <a:off x="457200" y="1097280"/>
-            <a:ext cx="5120640" cy="3017520"/>
-          </a:xfrm>
-          <a:prstGeom prst="roundRect">
-            <a:avLst>
-              <a:gd name="adj" fmla="val 4545"/>
-            </a:avLst>
-          </a:prstGeom>
-          <a:solidFill>
-            <a:srgbClr val="FFFFFF"/>
-          </a:solidFill>
-          <a:ln w="31750">
-            <a:solidFill>
-              <a:srgbClr val="1B1B2F"/>
-            </a:solidFill>
-            <a:prstDash val="solid"/>
           </a:ln>
           <a:effectLst>
-            <a:outerShdw sx="100000" sy="100000" kx="0" ky="0" algn="bl" rotWithShape="0" blurRad="101600" dist="63500" dir="2700000">
-              <a:srgbClr val="1B1B2F">
+            <a:outerShdw sx="100000" sy="100000" kx="0" ky="0" algn="bl" rotWithShape="0" blurRad="101600" dist="50800" dir="2700000">
+              <a:srgbClr val="000000">
                 <a:alpha val="100000"/>
               </a:srgbClr>
             </a:outerShdw>
           </a:effectLst>
         </p:spPr>
-      </p:sp>
-      <p:graphicFrame>
-        <p:nvGraphicFramePr>
-          <p:cNvPr id="6" name="Chart 0" descr=""/>
-          <p:cNvGraphicFramePr/>
-          <p:nvPr/>
-        </p:nvGraphicFramePr>
-        <p:xfrm>
-          <a:off x="548640" y="1188720"/>
-          <a:ext cx="4937760" cy="2834640"/>
-        </p:xfrm>
-        <a:graphic xmlns:a="http://schemas.openxmlformats.org/drawingml/2006/main">
-          <a:graphicData uri="http://schemas.openxmlformats.org/drawingml/2006/chart">
-            <c:chart xmlns:c="http://schemas.openxmlformats.org/drawingml/2006/chart" r:id="rId1"/>
-          </a:graphicData>
-        </a:graphic>
-      </p:graphicFrame>
-      <p:sp>
-        <p:nvSpPr>
-          <p:cNvPr id="7" name="Text 4"/>
-          <p:cNvSpPr txBox="1"/>
-          <p:nvPr/>
-        </p:nvSpPr>
-        <p:spPr>
-          <a:xfrm>
-            <a:off x="5760720" y="1097280"/>
-            <a:ext cx="914400" cy="621792"/>
-          </a:xfrm>
-          <a:prstGeom prst="rect">
-            <a:avLst/>
-          </a:prstGeom>
-          <a:noFill/>
-          <a:ln/>
-        </p:spPr>
-        <p:txBody>
-          <a:bodyPr wrap="square" lIns="0" tIns="0" rIns="0" bIns="0" rtlCol="0" anchor="ctr"/>
-          <a:lstStyle/>
-          <a:p>
-            <a:pPr algn="r" indent="0" marL="0">
+        <p:txBody>
+          <a:bodyPr wrap="square" lIns="50800" tIns="152400" rIns="152400" bIns="50800" rtlCol="0" anchor="ctr"/>
+          <a:lstStyle/>
+          <a:p>
+            <a:pPr algn="l" indent="0" marL="0">
               <a:buNone/>
             </a:pPr>
             <a:r>
-              <a:rPr lang="en-US" sz="3600" b="1" dirty="0">
-                <a:solidFill>
-                  <a:srgbClr val="5B5BD6"/>
-                </a:solidFill>
-                <a:latin typeface="Bookman Old Style" pitchFamily="34" charset="0"/>
-                <a:ea typeface="Bookman Old Style" pitchFamily="34" charset="-122"/>
-                <a:cs typeface="Bookman Old Style" pitchFamily="34" charset="-120"/>
-              </a:rPr>
-              <a:t>69</a:t>
-            </a:r>
-            <a:endParaRPr lang="en-US" sz="3600" dirty="0"/>
-          </a:p>
-        </p:txBody>
-      </p:sp>
-      <p:sp>
-        <p:nvSpPr>
-          <p:cNvPr id="8" name="Text 5"/>
-          <p:cNvSpPr txBox="1"/>
-          <p:nvPr/>
-        </p:nvSpPr>
-        <p:spPr>
-          <a:xfrm>
-            <a:off x="6766560" y="1097280"/>
-            <a:ext cx="2011680" cy="621792"/>
-          </a:xfrm>
-          <a:prstGeom prst="rect">
-            <a:avLst/>
-          </a:prstGeom>
-          <a:noFill/>
-          <a:ln/>
-        </p:spPr>
-        <p:txBody>
-          <a:bodyPr wrap="square" lIns="0" tIns="0" rIns="0" bIns="0" rtlCol="0" anchor="ctr"/>
-          <a:lstStyle/>
-          <a:p>
-            <a:pPr indent="0" marL="0">
-              <a:buNone/>
-            </a:pPr>
-            <a:r>
-              <a:rPr lang="en-US" sz="1200" b="1" dirty="0">
-                <a:solidFill>
-                  <a:srgbClr val="1B1B2F"/>
-                </a:solidFill>
-                <a:latin typeface="Calibri" pitchFamily="34" charset="0"/>
-                <a:ea typeface="Calibri" pitchFamily="34" charset="-122"/>
-                <a:cs typeface="Calibri" pitchFamily="34" charset="-120"/>
-              </a:rPr>
-              <a:t>Joko</a:t>
-            </a:r>
-            <a:endParaRPr lang="en-US" sz="1200" dirty="0"/>
-          </a:p>
-          <a:p>
-            <a:pPr indent="0" marL="0">
-              <a:buNone/>
-            </a:pPr>
-            <a:r>
-              <a:rPr lang="en-US" sz="1200" dirty="0">
-                <a:solidFill>
-                  <a:srgbClr val="1B1B2F"/>
-                </a:solidFill>
-                <a:latin typeface="Calibri" pitchFamily="34" charset="0"/>
-                <a:ea typeface="Calibri" pitchFamily="34" charset="-122"/>
-                <a:cs typeface="Calibri" pitchFamily="34" charset="-120"/>
-              </a:rPr>
-              <a:t>nouvelles pubs en 7 jours</a:t>
-            </a:r>
-            <a:endParaRPr lang="en-US" sz="1200" dirty="0"/>
-          </a:p>
-        </p:txBody>
-      </p:sp>
-      <p:sp>
-        <p:nvSpPr>
-          <p:cNvPr id="9" name="Text 6"/>
-          <p:cNvSpPr txBox="1"/>
-          <p:nvPr/>
-        </p:nvSpPr>
-        <p:spPr>
-          <a:xfrm>
-            <a:off x="5760720" y="1810512"/>
-            <a:ext cx="914400" cy="621792"/>
-          </a:xfrm>
-          <a:prstGeom prst="rect">
-            <a:avLst/>
-          </a:prstGeom>
-          <a:noFill/>
-          <a:ln/>
-        </p:spPr>
-        <p:txBody>
-          <a:bodyPr wrap="square" lIns="0" tIns="0" rIns="0" bIns="0" rtlCol="0" anchor="ctr"/>
-          <a:lstStyle/>
-          <a:p>
-            <a:pPr algn="r" indent="0" marL="0">
-              <a:buNone/>
-            </a:pPr>
-            <a:r>
-              <a:rPr lang="en-US" sz="3600" b="1" dirty="0">
-                <a:solidFill>
-                  <a:srgbClr val="0E9E8C"/>
-                </a:solidFill>
-                <a:latin typeface="Bookman Old Style" pitchFamily="34" charset="0"/>
-                <a:ea typeface="Bookman Old Style" pitchFamily="34" charset="-122"/>
-                <a:cs typeface="Bookman Old Style" pitchFamily="34" charset="-120"/>
-              </a:rPr>
-              <a:t>25</a:t>
-            </a:r>
-            <a:endParaRPr lang="en-US" sz="3600" dirty="0"/>
-          </a:p>
-        </p:txBody>
-      </p:sp>
-      <p:sp>
-        <p:nvSpPr>
-          <p:cNvPr id="10" name="Text 7"/>
-          <p:cNvSpPr txBox="1"/>
-          <p:nvPr/>
-        </p:nvSpPr>
-        <p:spPr>
-          <a:xfrm>
-            <a:off x="6766560" y="1810512"/>
-            <a:ext cx="2011680" cy="621792"/>
-          </a:xfrm>
-          <a:prstGeom prst="rect">
-            <a:avLst/>
-          </a:prstGeom>
-          <a:noFill/>
-          <a:ln/>
-        </p:spPr>
-        <p:txBody>
-          <a:bodyPr wrap="square" lIns="0" tIns="0" rIns="0" bIns="0" rtlCol="0" anchor="ctr"/>
-          <a:lstStyle/>
-          <a:p>
-            <a:pPr indent="0" marL="0">
-              <a:buNone/>
-            </a:pPr>
-            <a:r>
-              <a:rPr lang="en-US" sz="1200" b="1" dirty="0">
-                <a:solidFill>
-                  <a:srgbClr val="1B1B2F"/>
-                </a:solidFill>
-                <a:latin typeface="Calibri" pitchFamily="34" charset="0"/>
-                <a:ea typeface="Calibri" pitchFamily="34" charset="-122"/>
-                <a:cs typeface="Calibri" pitchFamily="34" charset="-120"/>
-              </a:rPr>
-              <a:t>Ibotta</a:t>
-            </a:r>
-            <a:endParaRPr lang="en-US" sz="1200" dirty="0"/>
-          </a:p>
-          <a:p>
-            <a:pPr indent="0" marL="0">
-              <a:buNone/>
-            </a:pPr>
-            <a:r>
-              <a:rPr lang="en-US" sz="1200" dirty="0">
-                <a:solidFill>
-                  <a:srgbClr val="1B1B2F"/>
-                </a:solidFill>
-                <a:latin typeface="Calibri" pitchFamily="34" charset="0"/>
-                <a:ea typeface="Calibri" pitchFamily="34" charset="-122"/>
-                <a:cs typeface="Calibri" pitchFamily="34" charset="-120"/>
-              </a:rPr>
-              <a:t>nouvelles pubs en 7 jours</a:t>
-            </a:r>
-            <a:endParaRPr lang="en-US" sz="1200" dirty="0"/>
-          </a:p>
-        </p:txBody>
-      </p:sp>
-      <p:sp>
-        <p:nvSpPr>
-          <p:cNvPr id="11" name="Text 8"/>
-          <p:cNvSpPr txBox="1"/>
-          <p:nvPr/>
-        </p:nvSpPr>
-        <p:spPr>
-          <a:xfrm>
-            <a:off x="5760720" y="2523744"/>
-            <a:ext cx="914400" cy="621792"/>
-          </a:xfrm>
-          <a:prstGeom prst="rect">
-            <a:avLst/>
-          </a:prstGeom>
-          <a:noFill/>
-          <a:ln/>
-        </p:spPr>
-        <p:txBody>
-          <a:bodyPr wrap="square" lIns="0" tIns="0" rIns="0" bIns="0" rtlCol="0" anchor="ctr"/>
-          <a:lstStyle/>
-          <a:p>
-            <a:pPr algn="r" indent="0" marL="0">
-              <a:buNone/>
-            </a:pPr>
-            <a:r>
-              <a:rPr lang="en-US" sz="3600" b="1" dirty="0">
-                <a:solidFill>
-                  <a:srgbClr val="EF4B4B"/>
-                </a:solidFill>
-                <a:latin typeface="Bookman Old Style" pitchFamily="34" charset="0"/>
-                <a:ea typeface="Bookman Old Style" pitchFamily="34" charset="-122"/>
-                <a:cs typeface="Bookman Old Style" pitchFamily="34" charset="-120"/>
-              </a:rPr>
-              <a:t>2</a:t>
-            </a:r>
-            <a:endParaRPr lang="en-US" sz="3600" dirty="0"/>
-          </a:p>
-        </p:txBody>
-      </p:sp>
-      <p:sp>
-        <p:nvSpPr>
-          <p:cNvPr id="12" name="Text 9"/>
-          <p:cNvSpPr txBox="1"/>
-          <p:nvPr/>
-        </p:nvSpPr>
-        <p:spPr>
-          <a:xfrm>
-            <a:off x="6766560" y="2523744"/>
-            <a:ext cx="2011680" cy="621792"/>
-          </a:xfrm>
-          <a:prstGeom prst="rect">
-            <a:avLst/>
-          </a:prstGeom>
-          <a:noFill/>
-          <a:ln/>
-        </p:spPr>
-        <p:txBody>
-          <a:bodyPr wrap="square" lIns="0" tIns="0" rIns="0" bIns="0" rtlCol="0" anchor="ctr"/>
-          <a:lstStyle/>
-          <a:p>
-            <a:pPr indent="0" marL="0">
-              <a:buNone/>
-            </a:pPr>
-            <a:r>
-              <a:rPr lang="en-US" sz="1200" b="1" dirty="0">
-                <a:solidFill>
-                  <a:srgbClr val="1B1B2F"/>
-                </a:solidFill>
-                <a:latin typeface="Calibri" pitchFamily="34" charset="0"/>
-                <a:ea typeface="Calibri" pitchFamily="34" charset="-122"/>
-                <a:cs typeface="Calibri" pitchFamily="34" charset="-120"/>
-              </a:rPr>
-              <a:t>10%</a:t>
-            </a:r>
-            <a:endParaRPr lang="en-US" sz="1200" dirty="0"/>
-          </a:p>
-          <a:p>
-            <a:pPr indent="0" marL="0">
-              <a:buNone/>
-            </a:pPr>
-            <a:r>
-              <a:rPr lang="en-US" sz="1200" dirty="0">
-                <a:solidFill>
-                  <a:srgbClr val="1B1B2F"/>
-                </a:solidFill>
-                <a:latin typeface="Calibri" pitchFamily="34" charset="0"/>
-                <a:ea typeface="Calibri" pitchFamily="34" charset="-122"/>
-                <a:cs typeface="Calibri" pitchFamily="34" charset="-120"/>
-              </a:rPr>
-              <a:t>nouvelles pubs en 7 jours</a:t>
-            </a:r>
-            <a:endParaRPr lang="en-US" sz="1200" dirty="0"/>
-          </a:p>
-        </p:txBody>
-      </p:sp>
-      <p:sp>
-        <p:nvSpPr>
-          <p:cNvPr id="13" name="Text 10"/>
-          <p:cNvSpPr txBox="1"/>
-          <p:nvPr/>
-        </p:nvSpPr>
-        <p:spPr>
-          <a:xfrm>
-            <a:off x="5897880" y="3291840"/>
-            <a:ext cx="2834640" cy="1097280"/>
-          </a:xfrm>
-          <a:prstGeom prst="rect">
-            <a:avLst/>
-          </a:prstGeom>
-          <a:noFill/>
-          <a:ln/>
-        </p:spPr>
-        <p:txBody>
-          <a:bodyPr wrap="square" lIns="0" tIns="0" rIns="0" bIns="0" rtlCol="0" anchor="t"/>
-          <a:lstStyle/>
-          <a:p>
-            <a:pPr indent="0" marL="0">
-              <a:buNone/>
-            </a:pPr>
-            <a:r>
-              <a:rPr lang="en-US" sz="1150" dirty="0">
-                <a:solidFill>
-                  <a:srgbClr val="1B1B2F"/>
-                </a:solidFill>
-                <a:latin typeface="Calibri" pitchFamily="34" charset="0"/>
-                <a:ea typeface="Calibri" pitchFamily="34" charset="-122"/>
-                <a:cs typeface="Calibri" pitchFamily="34" charset="-120"/>
-              </a:rPr>
-              <a:t>Joko en a sorti 45 le même jour. Une seule phrase, « T'as pas Joko ? Alors t'as sûrement déjà perdu 200€ », revient sur 99 de ses pubs, et ce sont les vidéos en dessous qui changent.</a:t>
-            </a:r>
-            <a:endParaRPr lang="en-US" sz="1150" dirty="0"/>
+              <a:rPr lang="en-US" sz="2100" b="1" i="1" dirty="0">
+                <a:solidFill>
+                  <a:srgbClr val="000000"/>
+                </a:solidFill>
+                <a:latin typeface="Fraunces" pitchFamily="34" charset="0"/>
+                <a:ea typeface="Fraunces" pitchFamily="34" charset="-122"/>
+                <a:cs typeface="Fraunces" pitchFamily="34" charset="-120"/>
+              </a:rPr>
+              <a:t>Joko et Ibotta testent beaucoup plus vite</a:t>
+            </a:r>
+            <a:endParaRPr lang="en-US" sz="2100" dirty="0"/>
           </a:p>
         </p:txBody>
       </p:sp>
       <p:pic>
         <p:nvPicPr>
-          <p:cNvPr id="14" name="Image 0" descr="preencoded.png">    </p:cNvPr>
+          <p:cNvPr id="5" name="Image 0" descr="/tmp/claude-0/-home-user-meta-ads---10-pourcent/a8c37ddd-b273-55c4-b52d-d5d00ba8e18a/scratchpad/deck/img/image96.png">    </p:cNvPr>
           <p:cNvPicPr>
             <a:picLocks noChangeAspect="1"/>
           </p:cNvPicPr>
           <p:nvPr/>
         </p:nvPicPr>
         <p:blipFill>
-          <a:blip r:embed="rId2"/>
+          <a:blip r:embed="rId1"/>
           <a:stretch>
             <a:fillRect/>
           </a:stretch>
         </p:blipFill>
         <p:spPr>
-          <a:xfrm>
-            <a:off x="502920" y="4315968"/>
-            <a:ext cx="548640" cy="548640"/>
+          <a:xfrm rot="360000">
+            <a:off x="7178040" y="137160"/>
+            <a:ext cx="1691640" cy="1024128"/>
           </a:xfrm>
           <a:prstGeom prst="rect">
             <a:avLst/>
@@ -3004,53 +2498,429 @@
       </p:pic>
       <p:sp>
         <p:nvSpPr>
-          <p:cNvPr id="15" name="Text 11"/>
+          <p:cNvPr id="6" name="Shape 3"/>
+          <p:cNvSpPr/>
+          <p:nvPr/>
+        </p:nvSpPr>
+        <p:spPr>
+          <a:xfrm>
+            <a:off x="320040" y="1234440"/>
+            <a:ext cx="5257800" cy="2606040"/>
+          </a:xfrm>
+          <a:prstGeom prst="rect">
+            <a:avLst/>
+          </a:prstGeom>
+          <a:solidFill>
+            <a:srgbClr val="FFFFFF"/>
+          </a:solidFill>
+          <a:ln w="38100">
+            <a:solidFill>
+              <a:srgbClr val="000000"/>
+            </a:solidFill>
+            <a:prstDash val="solid"/>
+          </a:ln>
+        </p:spPr>
+      </p:sp>
+      <p:graphicFrame>
+        <p:nvGraphicFramePr>
+          <p:cNvPr id="7" name="Chart 0" descr=""/>
+          <p:cNvGraphicFramePr/>
+          <p:nvPr/>
+        </p:nvGraphicFramePr>
+        <p:xfrm>
+          <a:off x="411480" y="1298448"/>
+          <a:ext cx="5074920" cy="2468880"/>
+        </p:xfrm>
+        <a:graphic xmlns:a="http://schemas.openxmlformats.org/drawingml/2006/main">
+          <a:graphicData uri="http://schemas.openxmlformats.org/drawingml/2006/chart">
+            <c:chart xmlns:c="http://schemas.openxmlformats.org/drawingml/2006/chart" r:id="rId2"/>
+          </a:graphicData>
+        </a:graphic>
+      </p:graphicFrame>
+      <p:sp>
+        <p:nvSpPr>
+          <p:cNvPr id="8" name="Text 4"/>
           <p:cNvSpPr txBox="1"/>
           <p:nvPr/>
         </p:nvSpPr>
         <p:spPr>
           <a:xfrm>
-            <a:off x="1234440" y="4315968"/>
-            <a:ext cx="5029200" cy="566928"/>
-          </a:xfrm>
-          <a:prstGeom prst="rect">
-            <a:avLst/>
-          </a:prstGeom>
-          <a:solidFill>
-            <a:srgbClr val="FFD93D"/>
-          </a:solidFill>
-          <a:ln w="31750">
-            <a:solidFill>
-              <a:srgbClr val="1B1B2F"/>
-            </a:solidFill>
-          </a:ln>
-          <a:effectLst>
-            <a:outerShdw sx="100000" sy="100000" kx="0" ky="0" algn="bl" rotWithShape="0" blurRad="101600" dist="63500" dir="2700000">
-              <a:srgbClr val="1B1B2F">
-                <a:alpha val="100000"/>
-              </a:srgbClr>
-            </a:outerShdw>
-          </a:effectLst>
-        </p:spPr>
-        <p:txBody>
-          <a:bodyPr wrap="square" lIns="101600" tIns="101600" rIns="101600" bIns="101600" rtlCol="0" anchor="ctr"/>
-          <a:lstStyle/>
-          <a:p>
-            <a:pPr algn="ctr" indent="0" marL="0">
+            <a:off x="5806440" y="1234440"/>
+            <a:ext cx="868680" cy="585216"/>
+          </a:xfrm>
+          <a:prstGeom prst="rect">
+            <a:avLst/>
+          </a:prstGeom>
+          <a:noFill/>
+          <a:ln/>
+        </p:spPr>
+        <p:txBody>
+          <a:bodyPr wrap="square" lIns="0" tIns="0" rIns="0" bIns="0" rtlCol="0" anchor="ctr"/>
+          <a:lstStyle/>
+          <a:p>
+            <a:pPr algn="r" indent="0" marL="0">
               <a:buNone/>
             </a:pPr>
             <a:r>
-              <a:rPr lang="en-US" sz="1250" i="1" dirty="0">
-                <a:solidFill>
-                  <a:srgbClr val="1B1B2F"/>
-                </a:solidFill>
-                <a:latin typeface="Calibri" pitchFamily="34" charset="0"/>
-                <a:ea typeface="Calibri" pitchFamily="34" charset="-122"/>
-                <a:cs typeface="Calibri" pitchFamily="34" charset="-120"/>
+              <a:rPr lang="en-US" sz="3400" b="1" i="1" dirty="0">
+                <a:solidFill>
+                  <a:srgbClr val="005B96"/>
+                </a:solidFill>
+                <a:latin typeface="Fraunces" pitchFamily="34" charset="0"/>
+                <a:ea typeface="Fraunces" pitchFamily="34" charset="-122"/>
+                <a:cs typeface="Fraunces" pitchFamily="34" charset="-120"/>
+              </a:rPr>
+              <a:t>69</a:t>
+            </a:r>
+            <a:endParaRPr lang="en-US" sz="3400" dirty="0"/>
+          </a:p>
+        </p:txBody>
+      </p:sp>
+      <p:sp>
+        <p:nvSpPr>
+          <p:cNvPr id="9" name="Text 5"/>
+          <p:cNvSpPr txBox="1"/>
+          <p:nvPr/>
+        </p:nvSpPr>
+        <p:spPr>
+          <a:xfrm>
+            <a:off x="6812280" y="1234440"/>
+            <a:ext cx="2057400" cy="585216"/>
+          </a:xfrm>
+          <a:prstGeom prst="rect">
+            <a:avLst/>
+          </a:prstGeom>
+          <a:noFill/>
+          <a:ln/>
+        </p:spPr>
+        <p:txBody>
+          <a:bodyPr wrap="square" lIns="0" tIns="0" rIns="0" bIns="0" rtlCol="0" anchor="ctr"/>
+          <a:lstStyle/>
+          <a:p>
+            <a:pPr indent="0" marL="0">
+              <a:buNone/>
+            </a:pPr>
+            <a:r>
+              <a:rPr lang="en-US" sz="1050" b="1" i="1" dirty="0">
+                <a:solidFill>
+                  <a:srgbClr val="333132"/>
+                </a:solidFill>
+                <a:latin typeface="Poppins" pitchFamily="34" charset="0"/>
+                <a:ea typeface="Poppins" pitchFamily="34" charset="-122"/>
+                <a:cs typeface="Poppins" pitchFamily="34" charset="-120"/>
+              </a:rPr>
+              <a:t>Joko</a:t>
+            </a:r>
+            <a:endParaRPr lang="en-US" sz="1050" dirty="0"/>
+          </a:p>
+          <a:p>
+            <a:pPr indent="0" marL="0">
+              <a:buNone/>
+            </a:pPr>
+            <a:r>
+              <a:rPr lang="en-US" sz="1050" i="1" dirty="0">
+                <a:solidFill>
+                  <a:srgbClr val="333132"/>
+                </a:solidFill>
+                <a:latin typeface="Poppins" pitchFamily="34" charset="0"/>
+                <a:ea typeface="Poppins" pitchFamily="34" charset="-122"/>
+                <a:cs typeface="Poppins" pitchFamily="34" charset="-120"/>
+              </a:rPr>
+              <a:t>nouvelles pubs en 7 jours</a:t>
+            </a:r>
+            <a:endParaRPr lang="en-US" sz="1050" dirty="0"/>
+          </a:p>
+        </p:txBody>
+      </p:sp>
+      <p:sp>
+        <p:nvSpPr>
+          <p:cNvPr id="10" name="Text 6"/>
+          <p:cNvSpPr txBox="1"/>
+          <p:nvPr/>
+        </p:nvSpPr>
+        <p:spPr>
+          <a:xfrm>
+            <a:off x="5806440" y="1892808"/>
+            <a:ext cx="868680" cy="585216"/>
+          </a:xfrm>
+          <a:prstGeom prst="rect">
+            <a:avLst/>
+          </a:prstGeom>
+          <a:noFill/>
+          <a:ln/>
+        </p:spPr>
+        <p:txBody>
+          <a:bodyPr wrap="square" lIns="0" tIns="0" rIns="0" bIns="0" rtlCol="0" anchor="ctr"/>
+          <a:lstStyle/>
+          <a:p>
+            <a:pPr algn="r" indent="0" marL="0">
+              <a:buNone/>
+            </a:pPr>
+            <a:r>
+              <a:rPr lang="en-US" sz="3400" b="1" i="1" dirty="0">
+                <a:solidFill>
+                  <a:srgbClr val="BA7A12"/>
+                </a:solidFill>
+                <a:latin typeface="Fraunces" pitchFamily="34" charset="0"/>
+                <a:ea typeface="Fraunces" pitchFamily="34" charset="-122"/>
+                <a:cs typeface="Fraunces" pitchFamily="34" charset="-120"/>
+              </a:rPr>
+              <a:t>25</a:t>
+            </a:r>
+            <a:endParaRPr lang="en-US" sz="3400" dirty="0"/>
+          </a:p>
+        </p:txBody>
+      </p:sp>
+      <p:sp>
+        <p:nvSpPr>
+          <p:cNvPr id="11" name="Text 7"/>
+          <p:cNvSpPr txBox="1"/>
+          <p:nvPr/>
+        </p:nvSpPr>
+        <p:spPr>
+          <a:xfrm>
+            <a:off x="6812280" y="1892808"/>
+            <a:ext cx="2057400" cy="585216"/>
+          </a:xfrm>
+          <a:prstGeom prst="rect">
+            <a:avLst/>
+          </a:prstGeom>
+          <a:noFill/>
+          <a:ln/>
+        </p:spPr>
+        <p:txBody>
+          <a:bodyPr wrap="square" lIns="0" tIns="0" rIns="0" bIns="0" rtlCol="0" anchor="ctr"/>
+          <a:lstStyle/>
+          <a:p>
+            <a:pPr indent="0" marL="0">
+              <a:buNone/>
+            </a:pPr>
+            <a:r>
+              <a:rPr lang="en-US" sz="1050" b="1" i="1" dirty="0">
+                <a:solidFill>
+                  <a:srgbClr val="333132"/>
+                </a:solidFill>
+                <a:latin typeface="Poppins" pitchFamily="34" charset="0"/>
+                <a:ea typeface="Poppins" pitchFamily="34" charset="-122"/>
+                <a:cs typeface="Poppins" pitchFamily="34" charset="-120"/>
+              </a:rPr>
+              <a:t>Ibotta</a:t>
+            </a:r>
+            <a:endParaRPr lang="en-US" sz="1050" dirty="0"/>
+          </a:p>
+          <a:p>
+            <a:pPr indent="0" marL="0">
+              <a:buNone/>
+            </a:pPr>
+            <a:r>
+              <a:rPr lang="en-US" sz="1050" i="1" dirty="0">
+                <a:solidFill>
+                  <a:srgbClr val="333132"/>
+                </a:solidFill>
+                <a:latin typeface="Poppins" pitchFamily="34" charset="0"/>
+                <a:ea typeface="Poppins" pitchFamily="34" charset="-122"/>
+                <a:cs typeface="Poppins" pitchFamily="34" charset="-120"/>
+              </a:rPr>
+              <a:t>nouvelles pubs en 7 jours</a:t>
+            </a:r>
+            <a:endParaRPr lang="en-US" sz="1050" dirty="0"/>
+          </a:p>
+        </p:txBody>
+      </p:sp>
+      <p:sp>
+        <p:nvSpPr>
+          <p:cNvPr id="12" name="Text 8"/>
+          <p:cNvSpPr txBox="1"/>
+          <p:nvPr/>
+        </p:nvSpPr>
+        <p:spPr>
+          <a:xfrm>
+            <a:off x="5806440" y="2551176"/>
+            <a:ext cx="868680" cy="585216"/>
+          </a:xfrm>
+          <a:prstGeom prst="rect">
+            <a:avLst/>
+          </a:prstGeom>
+          <a:noFill/>
+          <a:ln/>
+        </p:spPr>
+        <p:txBody>
+          <a:bodyPr wrap="square" lIns="0" tIns="0" rIns="0" bIns="0" rtlCol="0" anchor="ctr"/>
+          <a:lstStyle/>
+          <a:p>
+            <a:pPr algn="r" indent="0" marL="0">
+              <a:buNone/>
+            </a:pPr>
+            <a:r>
+              <a:rPr lang="en-US" sz="3400" b="1" i="1" dirty="0">
+                <a:solidFill>
+                  <a:srgbClr val="A4193D"/>
+                </a:solidFill>
+                <a:latin typeface="Fraunces" pitchFamily="34" charset="0"/>
+                <a:ea typeface="Fraunces" pitchFamily="34" charset="-122"/>
+                <a:cs typeface="Fraunces" pitchFamily="34" charset="-120"/>
+              </a:rPr>
+              <a:t>2</a:t>
+            </a:r>
+            <a:endParaRPr lang="en-US" sz="3400" dirty="0"/>
+          </a:p>
+        </p:txBody>
+      </p:sp>
+      <p:sp>
+        <p:nvSpPr>
+          <p:cNvPr id="13" name="Text 9"/>
+          <p:cNvSpPr txBox="1"/>
+          <p:nvPr/>
+        </p:nvSpPr>
+        <p:spPr>
+          <a:xfrm>
+            <a:off x="6812280" y="2551176"/>
+            <a:ext cx="2057400" cy="585216"/>
+          </a:xfrm>
+          <a:prstGeom prst="rect">
+            <a:avLst/>
+          </a:prstGeom>
+          <a:noFill/>
+          <a:ln/>
+        </p:spPr>
+        <p:txBody>
+          <a:bodyPr wrap="square" lIns="0" tIns="0" rIns="0" bIns="0" rtlCol="0" anchor="ctr"/>
+          <a:lstStyle/>
+          <a:p>
+            <a:pPr indent="0" marL="0">
+              <a:buNone/>
+            </a:pPr>
+            <a:r>
+              <a:rPr lang="en-US" sz="1050" b="1" i="1" dirty="0">
+                <a:solidFill>
+                  <a:srgbClr val="333132"/>
+                </a:solidFill>
+                <a:latin typeface="Poppins" pitchFamily="34" charset="0"/>
+                <a:ea typeface="Poppins" pitchFamily="34" charset="-122"/>
+                <a:cs typeface="Poppins" pitchFamily="34" charset="-120"/>
+              </a:rPr>
+              <a:t>10%</a:t>
+            </a:r>
+            <a:endParaRPr lang="en-US" sz="1050" dirty="0"/>
+          </a:p>
+          <a:p>
+            <a:pPr indent="0" marL="0">
+              <a:buNone/>
+            </a:pPr>
+            <a:r>
+              <a:rPr lang="en-US" sz="1050" i="1" dirty="0">
+                <a:solidFill>
+                  <a:srgbClr val="333132"/>
+                </a:solidFill>
+                <a:latin typeface="Poppins" pitchFamily="34" charset="0"/>
+                <a:ea typeface="Poppins" pitchFamily="34" charset="-122"/>
+                <a:cs typeface="Poppins" pitchFamily="34" charset="-120"/>
+              </a:rPr>
+              <a:t>nouvelles pubs en 7 jours</a:t>
+            </a:r>
+            <a:endParaRPr lang="en-US" sz="1050" dirty="0"/>
+          </a:p>
+        </p:txBody>
+      </p:sp>
+      <p:sp>
+        <p:nvSpPr>
+          <p:cNvPr id="14" name="Text 10"/>
+          <p:cNvSpPr txBox="1"/>
+          <p:nvPr/>
+        </p:nvSpPr>
+        <p:spPr>
+          <a:xfrm>
+            <a:off x="5806440" y="3291840"/>
+            <a:ext cx="3017520" cy="1188720"/>
+          </a:xfrm>
+          <a:prstGeom prst="rect">
+            <a:avLst/>
+          </a:prstGeom>
+          <a:noFill/>
+          <a:ln/>
+        </p:spPr>
+        <p:txBody>
+          <a:bodyPr wrap="square" lIns="0" tIns="0" rIns="0" bIns="0" rtlCol="0" anchor="t"/>
+          <a:lstStyle/>
+          <a:p>
+            <a:pPr algn="l" indent="0" marL="0">
+              <a:buNone/>
+            </a:pPr>
+            <a:r>
+              <a:rPr lang="en-US" sz="1050" i="1" dirty="0">
+                <a:solidFill>
+                  <a:srgbClr val="333132"/>
+                </a:solidFill>
+                <a:latin typeface="Poppins" pitchFamily="34" charset="0"/>
+                <a:ea typeface="Poppins" pitchFamily="34" charset="-122"/>
+                <a:cs typeface="Poppins" pitchFamily="34" charset="-120"/>
+              </a:rPr>
+              <a:t>Joko en a sorti 45 le même jour. Une seule phrase, « T'as pas Joko ? Alors t'as sûrement déjà perdu 200€ », revient sur 99 de ses pubs, et ce sont les vidéos en dessous qui changent.</a:t>
+            </a:r>
+            <a:endParaRPr lang="en-US" sz="1050" dirty="0"/>
+          </a:p>
+        </p:txBody>
+      </p:sp>
+      <p:pic>
+        <p:nvPicPr>
+          <p:cNvPr id="15" name="Image 1" descr="/tmp/claude-0/-home-user-meta-ads---10-pourcent/a8c37ddd-b273-55c4-b52d-d5d00ba8e18a/scratchpad/deck/img/image98.png">    </p:cNvPr>
+          <p:cNvPicPr>
+            <a:picLocks noChangeAspect="1"/>
+          </p:cNvPicPr>
+          <p:nvPr/>
+        </p:nvPicPr>
+        <p:blipFill>
+          <a:blip r:embed="rId3"/>
+          <a:stretch>
+            <a:fillRect/>
+          </a:stretch>
+        </p:blipFill>
+        <p:spPr>
+          <a:xfrm>
+            <a:off x="365760" y="3931920"/>
+            <a:ext cx="566928" cy="1188720"/>
+          </a:xfrm>
+          <a:prstGeom prst="rect">
+            <a:avLst/>
+          </a:prstGeom>
+        </p:spPr>
+      </p:pic>
+      <p:sp>
+        <p:nvSpPr>
+          <p:cNvPr id="16" name="Text 11"/>
+          <p:cNvSpPr txBox="1"/>
+          <p:nvPr/>
+        </p:nvSpPr>
+        <p:spPr>
+          <a:xfrm>
+            <a:off x="1097280" y="4069080"/>
+            <a:ext cx="4572000" cy="777240"/>
+          </a:xfrm>
+          <a:prstGeom prst="rect">
+            <a:avLst/>
+          </a:prstGeom>
+          <a:noFill/>
+          <a:ln/>
+        </p:spPr>
+        <p:txBody>
+          <a:bodyPr wrap="square" lIns="0" tIns="0" rIns="0" bIns="0" rtlCol="0" anchor="ctr"/>
+          <a:lstStyle/>
+          <a:p>
+            <a:pPr indent="0" marL="0">
+              <a:buNone/>
+            </a:pPr>
+            <a:r>
+              <a:rPr lang="en-US" sz="1500" dirty="0">
+                <a:solidFill>
+                  <a:srgbClr val="000000"/>
+                </a:solidFill>
+                <a:latin typeface="Architects Daughter" pitchFamily="34" charset="0"/>
+                <a:ea typeface="Architects Daughter" pitchFamily="34" charset="-122"/>
+                <a:cs typeface="Architects Daughter" pitchFamily="34" charset="-120"/>
               </a:rPr>
               <a:t>Oui, c'est évident, et c'est sûrement pour ça que vous recrutez (no shit, Sherlock).</a:t>
             </a:r>
-            <a:endParaRPr lang="en-US" sz="1250" dirty="0"/>
+            <a:endParaRPr lang="en-US" sz="1500" dirty="0"/>
           </a:p>
         </p:txBody>
       </p:sp>
@@ -3068,7 +2938,7 @@
     <p:bg>
       <p:bgPr>
         <a:solidFill>
-          <a:srgbClr val="FFFFFF"/>
+          <a:srgbClr val="FAF9EF"/>
         </a:solidFill>
       </p:bgPr>
     </p:bg>
@@ -3094,134 +2964,140 @@
         </p:nvSpPr>
         <p:spPr>
           <a:xfrm>
-            <a:off x="457200" y="320040"/>
-            <a:ext cx="502920" cy="502920"/>
+            <a:off x="320040" y="320040"/>
+            <a:ext cx="566928" cy="566928"/>
           </a:xfrm>
           <a:prstGeom prst="ellipse">
             <a:avLst/>
           </a:prstGeom>
           <a:solidFill>
-            <a:srgbClr val="EF4B4B"/>
+            <a:srgbClr val="F9C74F"/>
+          </a:solidFill>
+          <a:ln w="31750">
+            <a:solidFill>
+              <a:srgbClr val="000000"/>
+            </a:solidFill>
+            <a:prstDash val="solid"/>
+          </a:ln>
+        </p:spPr>
+      </p:sp>
+      <p:sp>
+        <p:nvSpPr>
+          <p:cNvPr id="3" name="Text 1"/>
+          <p:cNvSpPr txBox="1"/>
+          <p:nvPr/>
+        </p:nvSpPr>
+        <p:spPr>
+          <a:xfrm>
+            <a:off x="320040" y="320040"/>
+            <a:ext cx="566928" cy="566928"/>
+          </a:xfrm>
+          <a:prstGeom prst="rect">
+            <a:avLst/>
+          </a:prstGeom>
+          <a:noFill/>
+          <a:ln/>
+        </p:spPr>
+        <p:txBody>
+          <a:bodyPr wrap="square" lIns="0" tIns="0" rIns="0" bIns="0" rtlCol="0" anchor="ctr"/>
+          <a:lstStyle/>
+          <a:p>
+            <a:pPr algn="ctr" indent="0" marL="0">
+              <a:buNone/>
+            </a:pPr>
+            <a:r>
+              <a:rPr lang="en-US" sz="2400" dirty="0">
+                <a:solidFill>
+                  <a:srgbClr val="000000"/>
+                </a:solidFill>
+                <a:latin typeface="Architects Daughter" pitchFamily="34" charset="0"/>
+                <a:ea typeface="Architects Daughter" pitchFamily="34" charset="-122"/>
+                <a:cs typeface="Architects Daughter" pitchFamily="34" charset="-120"/>
+              </a:rPr>
+              <a:t>2</a:t>
+            </a:r>
+            <a:endParaRPr lang="en-US" sz="2400" dirty="0"/>
+          </a:p>
+        </p:txBody>
+      </p:sp>
+      <p:sp>
+        <p:nvSpPr>
+          <p:cNvPr id="4" name="Text 2"/>
+          <p:cNvSpPr txBox="1"/>
+          <p:nvPr/>
+        </p:nvSpPr>
+        <p:spPr>
+          <a:xfrm>
+            <a:off x="1051560" y="256032"/>
+            <a:ext cx="7772400" cy="868680"/>
+          </a:xfrm>
+          <a:prstGeom prst="roundRect">
+            <a:avLst>
+              <a:gd name="adj" fmla="val 12632"/>
+            </a:avLst>
+          </a:prstGeom>
+          <a:solidFill>
+            <a:srgbClr val="FFFFFF"/>
           </a:solidFill>
           <a:ln w="25400">
             <a:solidFill>
-              <a:srgbClr val="1B1B2F"/>
+              <a:srgbClr val="000000"/>
             </a:solidFill>
-            <a:prstDash val="solid"/>
-          </a:ln>
-        </p:spPr>
-      </p:sp>
-      <p:sp>
-        <p:nvSpPr>
-          <p:cNvPr id="3" name="Text 1"/>
-          <p:cNvSpPr txBox="1"/>
-          <p:nvPr/>
-        </p:nvSpPr>
-        <p:spPr>
-          <a:xfrm>
-            <a:off x="457200" y="320040"/>
-            <a:ext cx="502920" cy="502920"/>
-          </a:xfrm>
-          <a:prstGeom prst="rect">
-            <a:avLst/>
-          </a:prstGeom>
-          <a:noFill/>
-          <a:ln/>
-        </p:spPr>
-        <p:txBody>
-          <a:bodyPr wrap="square" lIns="0" tIns="0" rIns="0" bIns="0" rtlCol="0" anchor="ctr"/>
-          <a:lstStyle/>
-          <a:p>
-            <a:pPr algn="ctr" indent="0" marL="0">
-              <a:buNone/>
-            </a:pPr>
-            <a:r>
-              <a:rPr lang="en-US" sz="2000" b="1" dirty="0">
-                <a:solidFill>
-                  <a:srgbClr val="FFFFFF"/>
-                </a:solidFill>
-                <a:latin typeface="Bookman Old Style" pitchFamily="34" charset="0"/>
-                <a:ea typeface="Bookman Old Style" pitchFamily="34" charset="-122"/>
-                <a:cs typeface="Bookman Old Style" pitchFamily="34" charset="-120"/>
-              </a:rPr>
-              <a:t>2</a:t>
-            </a:r>
-            <a:endParaRPr lang="en-US" sz="2000" dirty="0"/>
-          </a:p>
-        </p:txBody>
-      </p:sp>
-      <p:sp>
-        <p:nvSpPr>
-          <p:cNvPr id="4" name="Text 2"/>
-          <p:cNvSpPr txBox="1"/>
-          <p:nvPr/>
-        </p:nvSpPr>
-        <p:spPr>
-          <a:xfrm>
-            <a:off x="1097280" y="274320"/>
-            <a:ext cx="7589520" cy="822960"/>
-          </a:xfrm>
-          <a:prstGeom prst="rect">
-            <a:avLst/>
-          </a:prstGeom>
-          <a:noFill/>
-          <a:ln/>
-        </p:spPr>
-        <p:txBody>
-          <a:bodyPr wrap="square" lIns="0" tIns="0" rIns="0" bIns="0" rtlCol="0" anchor="ctr"/>
-          <a:lstStyle/>
-          <a:p>
-            <a:pPr indent="0" marL="0">
-              <a:buNone/>
-            </a:pPr>
-            <a:r>
-              <a:rPr lang="en-US" sz="2100" b="1" dirty="0">
-                <a:solidFill>
-                  <a:srgbClr val="1B1B2F"/>
-                </a:solidFill>
-                <a:latin typeface="Bookman Old Style" pitchFamily="34" charset="0"/>
-                <a:ea typeface="Bookman Old Style" pitchFamily="34" charset="-122"/>
-                <a:cs typeface="Bookman Old Style" pitchFamily="34" charset="-120"/>
-              </a:rPr>
-              <a:t>Presque toutes les pubs de 10% parlent à des gens qui cherchent déjà une appli de cashback</a:t>
-            </a:r>
-            <a:endParaRPr lang="en-US" sz="2100" dirty="0"/>
-          </a:p>
-        </p:txBody>
-      </p:sp>
-      <p:sp>
-        <p:nvSpPr>
-          <p:cNvPr id="5" name="Shape 3"/>
-          <p:cNvSpPr/>
-          <p:nvPr/>
-        </p:nvSpPr>
-        <p:spPr>
-          <a:xfrm>
-            <a:off x="457200" y="1325880"/>
-            <a:ext cx="4114800" cy="2331720"/>
-          </a:xfrm>
-          <a:prstGeom prst="roundRect">
-            <a:avLst>
-              <a:gd name="adj" fmla="val 5882"/>
-            </a:avLst>
-          </a:prstGeom>
-          <a:solidFill>
-            <a:srgbClr val="FFFFFF"/>
-          </a:solidFill>
-          <a:ln w="31750">
-            <a:solidFill>
-              <a:srgbClr val="1B1B2F"/>
-            </a:solidFill>
-            <a:prstDash val="solid"/>
           </a:ln>
           <a:effectLst>
-            <a:outerShdw sx="100000" sy="100000" kx="0" ky="0" algn="bl" rotWithShape="0" blurRad="101600" dist="63500" dir="2700000">
-              <a:srgbClr val="1B1B2F">
+            <a:outerShdw sx="100000" sy="100000" kx="0" ky="0" algn="bl" rotWithShape="0" blurRad="101600" dist="50800" dir="2700000">
+              <a:srgbClr val="000000">
                 <a:alpha val="100000"/>
               </a:srgbClr>
             </a:outerShdw>
           </a:effectLst>
         </p:spPr>
+        <p:txBody>
+          <a:bodyPr wrap="square" lIns="50800" tIns="152400" rIns="152400" bIns="50800" rtlCol="0" anchor="ctr"/>
+          <a:lstStyle/>
+          <a:p>
+            <a:pPr algn="l" indent="0" marL="0">
+              <a:buNone/>
+            </a:pPr>
+            <a:r>
+              <a:rPr lang="en-US" sz="1700" b="1" i="1" dirty="0">
+                <a:solidFill>
+                  <a:srgbClr val="000000"/>
+                </a:solidFill>
+                <a:latin typeface="Fraunces" pitchFamily="34" charset="0"/>
+                <a:ea typeface="Fraunces" pitchFamily="34" charset="-122"/>
+                <a:cs typeface="Fraunces" pitchFamily="34" charset="-120"/>
+              </a:rPr>
+              <a:t>Presque toutes les pubs de 10% parlent à des gens qui cherchent déjà une appli de cashback</a:t>
+            </a:r>
+            <a:endParaRPr lang="en-US" sz="1700" dirty="0"/>
+          </a:p>
+        </p:txBody>
+      </p:sp>
+      <p:sp>
+        <p:nvSpPr>
+          <p:cNvPr id="5" name="Shape 3"/>
+          <p:cNvSpPr/>
+          <p:nvPr/>
+        </p:nvSpPr>
+        <p:spPr>
+          <a:xfrm>
+            <a:off x="320040" y="1417320"/>
+            <a:ext cx="4160520" cy="2240280"/>
+          </a:xfrm>
+          <a:prstGeom prst="rect">
+            <a:avLst/>
+          </a:prstGeom>
+          <a:solidFill>
+            <a:srgbClr val="FFFFFF"/>
+          </a:solidFill>
+          <a:ln w="38100">
+            <a:solidFill>
+              <a:srgbClr val="000000"/>
+            </a:solidFill>
+            <a:prstDash val="solid"/>
+          </a:ln>
+        </p:spPr>
       </p:sp>
       <p:graphicFrame>
         <p:nvGraphicFramePr>
@@ -3230,8 +3106,8 @@
           <p:nvPr/>
         </p:nvGraphicFramePr>
         <p:xfrm>
-          <a:off x="548640" y="1417320"/>
-          <a:ext cx="3931920" cy="2148840"/>
+          <a:off x="411480" y="1481328"/>
+          <a:ext cx="3977640" cy="2103120"/>
         </p:xfrm>
         <a:graphic xmlns:a="http://schemas.openxmlformats.org/drawingml/2006/main">
           <a:graphicData uri="http://schemas.openxmlformats.org/drawingml/2006/chart">
@@ -3247,8 +3123,8 @@
         </p:nvSpPr>
         <p:spPr>
           <a:xfrm>
-            <a:off x="4892040" y="1325880"/>
-            <a:ext cx="3794760" cy="1051560"/>
+            <a:off x="4800600" y="1417320"/>
+            <a:ext cx="4023360" cy="960120"/>
           </a:xfrm>
           <a:prstGeom prst="rect">
             <a:avLst/>
@@ -3260,21 +3136,21 @@
           <a:bodyPr wrap="square" lIns="0" tIns="0" rIns="0" bIns="0" rtlCol="0" anchor="t"/>
           <a:lstStyle/>
           <a:p>
-            <a:pPr indent="0" marL="0">
+            <a:pPr algn="l" indent="0" marL="0">
               <a:buNone/>
             </a:pPr>
             <a:r>
-              <a:rPr lang="en-US" sz="1300" dirty="0">
-                <a:solidFill>
-                  <a:srgbClr val="1B1B2F"/>
-                </a:solidFill>
-                <a:latin typeface="Calibri" pitchFamily="34" charset="0"/>
-                <a:ea typeface="Calibri" pitchFamily="34" charset="-122"/>
-                <a:cs typeface="Calibri" pitchFamily="34" charset="-120"/>
+              <a:rPr lang="en-US" sz="1150" i="1" dirty="0">
+                <a:solidFill>
+                  <a:srgbClr val="333132"/>
+                </a:solidFill>
+                <a:latin typeface="Poppins" pitchFamily="34" charset="0"/>
+                <a:ea typeface="Poppins" pitchFamily="34" charset="-122"/>
+                <a:cs typeface="Poppins" pitchFamily="34" charset="-120"/>
               </a:rPr>
               <a:t>93% des pubs de 10% présentent l'appli, contre 33% chez Joko et 67% chez Ibotta. Leurs autres pubs parlent du problème : les courses qui coûtent trop cher, l'argent qu'on laisse en caisse.</a:t>
             </a:r>
-            <a:endParaRPr lang="en-US" sz="1300" dirty="0"/>
+            <a:endParaRPr lang="en-US" sz="1150" dirty="0"/>
           </a:p>
         </p:txBody>
       </p:sp>
@@ -3286,8 +3162,8 @@
         </p:nvSpPr>
         <p:spPr>
           <a:xfrm>
-            <a:off x="4892040" y="2423160"/>
-            <a:ext cx="3794760" cy="1188720"/>
+            <a:off x="4800600" y="2468880"/>
+            <a:ext cx="3108960" cy="1234440"/>
           </a:xfrm>
           <a:prstGeom prst="rect">
             <a:avLst/>
@@ -3299,59 +3175,27 @@
           <a:bodyPr wrap="square" lIns="0" tIns="0" rIns="0" bIns="0" rtlCol="0" anchor="t"/>
           <a:lstStyle/>
           <a:p>
-            <a:pPr indent="0" marL="0">
+            <a:pPr algn="l" indent="0" marL="0">
               <a:buNone/>
             </a:pPr>
             <a:r>
-              <a:rPr lang="en-US" sz="1300" b="1" dirty="0">
-                <a:solidFill>
-                  <a:srgbClr val="1B1B2F"/>
-                </a:solidFill>
-                <a:latin typeface="Calibri" pitchFamily="34" charset="0"/>
-                <a:ea typeface="Calibri" pitchFamily="34" charset="-122"/>
-                <a:cs typeface="Calibri" pitchFamily="34" charset="-120"/>
+              <a:rPr lang="en-US" sz="1150" b="1" i="1" dirty="0">
+                <a:solidFill>
+                  <a:srgbClr val="000000"/>
+                </a:solidFill>
+                <a:latin typeface="Poppins" pitchFamily="34" charset="0"/>
+                <a:ea typeface="Poppins" pitchFamily="34" charset="-122"/>
+                <a:cs typeface="Poppins" pitchFamily="34" charset="-120"/>
               </a:rPr>
               <a:t>It's probably meant to build awareness, but it still shrinks the market: you only reach solution-aware people who are already looking for an app. What about everyone higher up the funnel?</a:t>
             </a:r>
-            <a:endParaRPr lang="en-US" sz="1300" dirty="0"/>
-          </a:p>
-        </p:txBody>
-      </p:sp>
-      <p:sp>
-        <p:nvSpPr>
-          <p:cNvPr id="9" name="Shape 6"/>
-          <p:cNvSpPr/>
-          <p:nvPr/>
-        </p:nvSpPr>
-        <p:spPr>
-          <a:xfrm rot="-60000">
-            <a:off x="731520" y="3931920"/>
-            <a:ext cx="7680960" cy="868680"/>
-          </a:xfrm>
-          <a:prstGeom prst="rect">
-            <a:avLst/>
-          </a:prstGeom>
-          <a:solidFill>
-            <a:srgbClr val="FFF3A8"/>
-          </a:solidFill>
-          <a:ln w="25400">
-            <a:solidFill>
-              <a:srgbClr val="1B1B2F"/>
-            </a:solidFill>
-            <a:prstDash val="solid"/>
-          </a:ln>
-          <a:effectLst>
-            <a:outerShdw sx="100000" sy="100000" kx="0" ky="0" algn="bl" rotWithShape="0" blurRad="101600" dist="63500" dir="2700000">
-              <a:srgbClr val="1B1B2F">
-                <a:alpha val="100000"/>
-              </a:srgbClr>
-            </a:outerShdw>
-          </a:effectLst>
-        </p:spPr>
+            <a:endParaRPr lang="en-US" sz="1150" dirty="0"/>
+          </a:p>
+        </p:txBody>
       </p:sp>
       <p:pic>
         <p:nvPicPr>
-          <p:cNvPr id="10" name="Image 0" descr="preencoded.png">    </p:cNvPr>
+          <p:cNvPr id="9" name="Image 0" descr="/tmp/claude-0/-home-user-meta-ads---10-pourcent/a8c37ddd-b273-55c4-b52d-d5d00ba8e18a/scratchpad/deck/img/image116.png">    </p:cNvPr>
           <p:cNvPicPr>
             <a:picLocks noChangeAspect="1"/>
           </p:cNvPicPr>
@@ -3365,24 +3209,48 @@
         </p:blipFill>
         <p:spPr>
           <a:xfrm>
-            <a:off x="914400" y="4114800"/>
-            <a:ext cx="502920" cy="502920"/>
+            <a:off x="8001000" y="2468880"/>
+            <a:ext cx="804672" cy="1133856"/>
           </a:xfrm>
           <a:prstGeom prst="rect">
             <a:avLst/>
           </a:prstGeom>
         </p:spPr>
       </p:pic>
-      <p:sp>
-        <p:nvSpPr>
-          <p:cNvPr id="11" name="Text 7"/>
+      <p:pic>
+        <p:nvPicPr>
+          <p:cNvPr id="10" name="Image 1" descr="/tmp/claude-0/-home-user-meta-ads---10-pourcent/a8c37ddd-b273-55c4-b52d-d5d00ba8e18a/scratchpad/deck/img/image197.png">    </p:cNvPr>
+          <p:cNvPicPr>
+            <a:picLocks noChangeAspect="1"/>
+          </p:cNvPicPr>
+          <p:nvPr/>
+        </p:nvPicPr>
+        <p:blipFill>
+          <a:blip r:embed="rId3"/>
+          <a:stretch>
+            <a:fillRect/>
+          </a:stretch>
+        </p:blipFill>
+        <p:spPr>
+          <a:xfrm>
+            <a:off x="365760" y="3794760"/>
+            <a:ext cx="822960" cy="1234440"/>
+          </a:xfrm>
+          <a:prstGeom prst="rect">
+            <a:avLst/>
+          </a:prstGeom>
+        </p:spPr>
+      </p:pic>
+      <p:sp>
+        <p:nvSpPr>
+          <p:cNvPr id="11" name="Text 6"/>
           <p:cNvSpPr txBox="1"/>
           <p:nvPr/>
         </p:nvSpPr>
         <p:spPr>
-          <a:xfrm rot="-60000">
-            <a:off x="1600200" y="3977640"/>
-            <a:ext cx="6675120" cy="777240"/>
+          <a:xfrm>
+            <a:off x="1325880" y="3886200"/>
+            <a:ext cx="7498080" cy="1005840"/>
           </a:xfrm>
           <a:prstGeom prst="rect">
             <a:avLst/>
@@ -3398,17 +3266,17 @@
               <a:buNone/>
             </a:pPr>
             <a:r>
-              <a:rPr lang="en-US" sz="1200" i="1" dirty="0">
-                <a:solidFill>
-                  <a:srgbClr val="1B1B2F"/>
-                </a:solidFill>
-                <a:latin typeface="Calibri" pitchFamily="34" charset="0"/>
-                <a:ea typeface="Calibri" pitchFamily="34" charset="-122"/>
-                <a:cs typeface="Calibri" pitchFamily="34" charset="-120"/>
+              <a:rPr lang="en-US" sz="1350" dirty="0">
+                <a:solidFill>
+                  <a:srgbClr val="000000"/>
+                </a:solidFill>
+                <a:latin typeface="Architects Daughter" pitchFamily="34" charset="0"/>
+                <a:ea typeface="Architects Daughter" pitchFamily="34" charset="-122"/>
+                <a:cs typeface="Architects Daughter" pitchFamily="34" charset="-120"/>
               </a:rPr>
               <a:t>Also, the Meta algorithm seems to like having ads at different awareness levels, and uses them for retargeting. Disclaimer: I have zero proof 🤷 I heard it on Instagram, source: trust me bro.</a:t>
             </a:r>
-            <a:endParaRPr lang="en-US" sz="1200" dirty="0"/>
+            <a:endParaRPr lang="en-US" sz="1350" dirty="0"/>
           </a:p>
         </p:txBody>
       </p:sp>
@@ -3426,7 +3294,7 @@
     <p:bg>
       <p:bgPr>
         <a:solidFill>
-          <a:srgbClr val="FFFFFF"/>
+          <a:srgbClr val="FAF9EF"/>
         </a:solidFill>
       </p:bgPr>
     </p:bg>
@@ -3452,390 +3320,151 @@
         </p:nvSpPr>
         <p:spPr>
           <a:xfrm>
-            <a:off x="457200" y="320040"/>
-            <a:ext cx="502920" cy="502920"/>
+            <a:off x="320040" y="320040"/>
+            <a:ext cx="566928" cy="566928"/>
           </a:xfrm>
           <a:prstGeom prst="ellipse">
             <a:avLst/>
           </a:prstGeom>
           <a:solidFill>
-            <a:srgbClr val="EF4B4B"/>
+            <a:srgbClr val="F9C74F"/>
+          </a:solidFill>
+          <a:ln w="31750">
+            <a:solidFill>
+              <a:srgbClr val="000000"/>
+            </a:solidFill>
+            <a:prstDash val="solid"/>
+          </a:ln>
+        </p:spPr>
+      </p:sp>
+      <p:sp>
+        <p:nvSpPr>
+          <p:cNvPr id="3" name="Text 1"/>
+          <p:cNvSpPr txBox="1"/>
+          <p:nvPr/>
+        </p:nvSpPr>
+        <p:spPr>
+          <a:xfrm>
+            <a:off x="320040" y="320040"/>
+            <a:ext cx="566928" cy="566928"/>
+          </a:xfrm>
+          <a:prstGeom prst="rect">
+            <a:avLst/>
+          </a:prstGeom>
+          <a:noFill/>
+          <a:ln/>
+        </p:spPr>
+        <p:txBody>
+          <a:bodyPr wrap="square" lIns="0" tIns="0" rIns="0" bIns="0" rtlCol="0" anchor="ctr"/>
+          <a:lstStyle/>
+          <a:p>
+            <a:pPr algn="ctr" indent="0" marL="0">
+              <a:buNone/>
+            </a:pPr>
+            <a:r>
+              <a:rPr lang="en-US" sz="2400" dirty="0">
+                <a:solidFill>
+                  <a:srgbClr val="000000"/>
+                </a:solidFill>
+                <a:latin typeface="Architects Daughter" pitchFamily="34" charset="0"/>
+                <a:ea typeface="Architects Daughter" pitchFamily="34" charset="-122"/>
+                <a:cs typeface="Architects Daughter" pitchFamily="34" charset="-120"/>
+              </a:rPr>
+              <a:t>3</a:t>
+            </a:r>
+            <a:endParaRPr lang="en-US" sz="2400" dirty="0"/>
+          </a:p>
+        </p:txBody>
+      </p:sp>
+      <p:sp>
+        <p:nvSpPr>
+          <p:cNvPr id="4" name="Text 2"/>
+          <p:cNvSpPr txBox="1"/>
+          <p:nvPr/>
+        </p:nvSpPr>
+        <p:spPr>
+          <a:xfrm>
+            <a:off x="1051560" y="301752"/>
+            <a:ext cx="7772400" cy="603504"/>
+          </a:xfrm>
+          <a:prstGeom prst="roundRect">
+            <a:avLst>
+              <a:gd name="adj" fmla="val 18182"/>
+            </a:avLst>
+          </a:prstGeom>
+          <a:solidFill>
+            <a:srgbClr val="FFFFFF"/>
           </a:solidFill>
           <a:ln w="25400">
             <a:solidFill>
-              <a:srgbClr val="1B1B2F"/>
+              <a:srgbClr val="000000"/>
             </a:solidFill>
-            <a:prstDash val="solid"/>
-          </a:ln>
-        </p:spPr>
-      </p:sp>
-      <p:sp>
-        <p:nvSpPr>
-          <p:cNvPr id="3" name="Text 1"/>
-          <p:cNvSpPr txBox="1"/>
-          <p:nvPr/>
-        </p:nvSpPr>
-        <p:spPr>
-          <a:xfrm>
-            <a:off x="457200" y="320040"/>
-            <a:ext cx="502920" cy="502920"/>
-          </a:xfrm>
-          <a:prstGeom prst="rect">
-            <a:avLst/>
-          </a:prstGeom>
-          <a:noFill/>
-          <a:ln/>
-        </p:spPr>
-        <p:txBody>
-          <a:bodyPr wrap="square" lIns="0" tIns="0" rIns="0" bIns="0" rtlCol="0" anchor="ctr"/>
-          <a:lstStyle/>
-          <a:p>
-            <a:pPr algn="ctr" indent="0" marL="0">
-              <a:buNone/>
-            </a:pPr>
-            <a:r>
-              <a:rPr lang="en-US" sz="2000" b="1" dirty="0">
-                <a:solidFill>
-                  <a:srgbClr val="FFFFFF"/>
-                </a:solidFill>
-                <a:latin typeface="Bookman Old Style" pitchFamily="34" charset="0"/>
-                <a:ea typeface="Bookman Old Style" pitchFamily="34" charset="-122"/>
-                <a:cs typeface="Bookman Old Style" pitchFamily="34" charset="-120"/>
-              </a:rPr>
-              <a:t>3</a:t>
-            </a:r>
-            <a:endParaRPr lang="en-US" sz="2000" dirty="0"/>
-          </a:p>
-        </p:txBody>
-      </p:sp>
-      <p:sp>
-        <p:nvSpPr>
-          <p:cNvPr id="4" name="Text 2"/>
-          <p:cNvSpPr txBox="1"/>
-          <p:nvPr/>
-        </p:nvSpPr>
-        <p:spPr>
-          <a:xfrm>
-            <a:off x="1097280" y="320040"/>
-            <a:ext cx="7589520" cy="502920"/>
-          </a:xfrm>
-          <a:prstGeom prst="rect">
-            <a:avLst/>
-          </a:prstGeom>
-          <a:noFill/>
-          <a:ln/>
-        </p:spPr>
-        <p:txBody>
-          <a:bodyPr wrap="square" lIns="0" tIns="0" rIns="0" bIns="0" rtlCol="0" anchor="ctr"/>
-          <a:lstStyle/>
-          <a:p>
-            <a:pPr indent="0" marL="0">
-              <a:buNone/>
-            </a:pPr>
-            <a:r>
-              <a:rPr lang="en-US" sz="2400" b="1" dirty="0">
-                <a:solidFill>
-                  <a:srgbClr val="1B1B2F"/>
-                </a:solidFill>
-                <a:latin typeface="Bookman Old Style" pitchFamily="34" charset="0"/>
-                <a:ea typeface="Bookman Old Style" pitchFamily="34" charset="-122"/>
-                <a:cs typeface="Bookman Old Style" pitchFamily="34" charset="-120"/>
-              </a:rPr>
-              <a:t>10% a un catalogue de 1 300 produits, mais aucune pub catalogue</a:t>
-            </a:r>
-            <a:endParaRPr lang="en-US" sz="2400" dirty="0"/>
-          </a:p>
-        </p:txBody>
-      </p:sp>
-      <p:sp>
-        <p:nvSpPr>
-          <p:cNvPr id="5" name="Shape 3"/>
-          <p:cNvSpPr/>
-          <p:nvPr/>
-        </p:nvSpPr>
-        <p:spPr>
-          <a:xfrm>
-            <a:off x="457200" y="1143000"/>
-            <a:ext cx="2560320" cy="2514600"/>
-          </a:xfrm>
-          <a:prstGeom prst="roundRect">
-            <a:avLst>
-              <a:gd name="adj" fmla="val 5455"/>
-            </a:avLst>
-          </a:prstGeom>
-          <a:solidFill>
-            <a:srgbClr val="FFFFFF"/>
-          </a:solidFill>
-          <a:ln w="31750">
-            <a:solidFill>
-              <a:srgbClr val="1B1B2F"/>
-            </a:solidFill>
-            <a:prstDash val="solid"/>
           </a:ln>
           <a:effectLst>
-            <a:outerShdw sx="100000" sy="100000" kx="0" ky="0" algn="bl" rotWithShape="0" blurRad="101600" dist="63500" dir="2700000">
-              <a:srgbClr val="1B1B2F">
+            <a:outerShdw sx="100000" sy="100000" kx="0" ky="0" algn="bl" rotWithShape="0" blurRad="101600" dist="50800" dir="2700000">
+              <a:srgbClr val="000000">
                 <a:alpha val="100000"/>
               </a:srgbClr>
             </a:outerShdw>
           </a:effectLst>
         </p:spPr>
-      </p:sp>
-      <p:sp>
-        <p:nvSpPr>
-          <p:cNvPr id="6" name="Text 4"/>
-          <p:cNvSpPr txBox="1"/>
-          <p:nvPr/>
-        </p:nvSpPr>
-        <p:spPr>
-          <a:xfrm>
-            <a:off x="640080" y="1280160"/>
-            <a:ext cx="1005840" cy="347472"/>
-          </a:xfrm>
-          <a:prstGeom prst="roundRect">
-            <a:avLst>
-              <a:gd name="adj" fmla="val 31579"/>
-            </a:avLst>
-          </a:prstGeom>
-          <a:solidFill>
-            <a:srgbClr val="0E9E8C"/>
-          </a:solidFill>
-          <a:ln w="25400">
-            <a:solidFill>
-              <a:srgbClr val="1B1B2F"/>
-            </a:solidFill>
-          </a:ln>
-        </p:spPr>
-        <p:txBody>
-          <a:bodyPr wrap="square" lIns="0" tIns="0" rIns="0" bIns="0" rtlCol="0" anchor="ctr"/>
-          <a:lstStyle/>
-          <a:p>
-            <a:pPr algn="ctr" indent="0" marL="0">
+        <p:txBody>
+          <a:bodyPr wrap="square" lIns="50800" tIns="152400" rIns="152400" bIns="50800" rtlCol="0" anchor="ctr"/>
+          <a:lstStyle/>
+          <a:p>
+            <a:pPr algn="l" indent="0" marL="0">
               <a:buNone/>
             </a:pPr>
             <a:r>
-              <a:rPr lang="en-US" sz="1200" b="1" dirty="0">
-                <a:solidFill>
-                  <a:srgbClr val="FFFFFF"/>
-                </a:solidFill>
-                <a:latin typeface="Calibri" pitchFamily="34" charset="0"/>
-                <a:ea typeface="Calibri" pitchFamily="34" charset="-122"/>
-                <a:cs typeface="Calibri" pitchFamily="34" charset="-120"/>
-              </a:rPr>
-              <a:t>Ibotta</a:t>
-            </a:r>
-            <a:endParaRPr lang="en-US" sz="1200" dirty="0"/>
-          </a:p>
-        </p:txBody>
-      </p:sp>
-      <p:sp>
-        <p:nvSpPr>
-          <p:cNvPr id="7" name="Text 5"/>
-          <p:cNvSpPr txBox="1"/>
-          <p:nvPr/>
-        </p:nvSpPr>
-        <p:spPr>
-          <a:xfrm>
-            <a:off x="640080" y="1691640"/>
-            <a:ext cx="2194560" cy="868680"/>
-          </a:xfrm>
-          <a:prstGeom prst="rect">
-            <a:avLst/>
-          </a:prstGeom>
-          <a:noFill/>
-          <a:ln/>
-        </p:spPr>
-        <p:txBody>
-          <a:bodyPr wrap="square" lIns="0" tIns="0" rIns="0" bIns="0" rtlCol="0" anchor="ctr"/>
-          <a:lstStyle/>
-          <a:p>
-            <a:pPr indent="0" marL="0">
-              <a:buNone/>
-            </a:pPr>
-            <a:r>
-              <a:rPr lang="en-US" sz="6000" b="1" dirty="0">
-                <a:solidFill>
-                  <a:srgbClr val="0E9E8C"/>
-                </a:solidFill>
-                <a:latin typeface="Bookman Old Style" pitchFamily="34" charset="0"/>
-                <a:ea typeface="Bookman Old Style" pitchFamily="34" charset="-122"/>
-                <a:cs typeface="Bookman Old Style" pitchFamily="34" charset="-120"/>
-              </a:rPr>
-              <a:t>32</a:t>
-            </a:r>
-            <a:endParaRPr lang="en-US" sz="6000" dirty="0"/>
-          </a:p>
-        </p:txBody>
-      </p:sp>
-      <p:sp>
-        <p:nvSpPr>
-          <p:cNvPr id="8" name="Text 6"/>
-          <p:cNvSpPr txBox="1"/>
-          <p:nvPr/>
-        </p:nvSpPr>
-        <p:spPr>
-          <a:xfrm>
-            <a:off x="640080" y="2560320"/>
-            <a:ext cx="2194560" cy="274320"/>
-          </a:xfrm>
-          <a:prstGeom prst="rect">
-            <a:avLst/>
-          </a:prstGeom>
-          <a:noFill/>
-          <a:ln/>
-        </p:spPr>
-        <p:txBody>
-          <a:bodyPr wrap="square" lIns="0" tIns="0" rIns="0" bIns="0" rtlCol="0" anchor="ctr"/>
-          <a:lstStyle/>
-          <a:p>
-            <a:pPr indent="0" marL="0">
-              <a:buNone/>
-            </a:pPr>
-            <a:r>
-              <a:rPr lang="en-US" sz="1300" b="1" dirty="0">
-                <a:solidFill>
-                  <a:srgbClr val="1B1B2F"/>
-                </a:solidFill>
-                <a:latin typeface="Calibri" pitchFamily="34" charset="0"/>
-                <a:ea typeface="Calibri" pitchFamily="34" charset="-122"/>
-                <a:cs typeface="Calibri" pitchFamily="34" charset="-120"/>
-              </a:rPr>
-              <a:t>pubs catalogue</a:t>
-            </a:r>
-            <a:endParaRPr lang="en-US" sz="1300" dirty="0"/>
-          </a:p>
-        </p:txBody>
-      </p:sp>
-      <p:sp>
-        <p:nvSpPr>
-          <p:cNvPr id="9" name="Text 7"/>
-          <p:cNvSpPr txBox="1"/>
-          <p:nvPr/>
-        </p:nvSpPr>
-        <p:spPr>
-          <a:xfrm>
-            <a:off x="640080" y="2852928"/>
-            <a:ext cx="2194560" cy="731520"/>
-          </a:xfrm>
-          <a:prstGeom prst="rect">
-            <a:avLst/>
-          </a:prstGeom>
-          <a:noFill/>
-          <a:ln/>
-        </p:spPr>
-        <p:txBody>
-          <a:bodyPr wrap="square" lIns="0" tIns="0" rIns="0" bIns="0" rtlCol="0" anchor="t"/>
-          <a:lstStyle/>
-          <a:p>
-            <a:pPr indent="0" marL="0">
-              <a:buNone/>
-            </a:pPr>
-            <a:r>
-              <a:rPr lang="en-US" sz="1150" dirty="0">
-                <a:solidFill>
-                  <a:srgbClr val="1B1B2F"/>
-                </a:solidFill>
-                <a:latin typeface="Calibri" pitchFamily="34" charset="0"/>
-                <a:ea typeface="Calibri" pitchFamily="34" charset="-122"/>
-                <a:cs typeface="Calibri" pitchFamily="34" charset="-120"/>
-              </a:rPr>
-              <a:t>20 tournent depuis 30+ jours, la plus ancienne depuis 483 jours</a:t>
-            </a:r>
-            <a:endParaRPr lang="en-US" sz="1150" dirty="0"/>
-          </a:p>
-        </p:txBody>
-      </p:sp>
-      <p:sp>
-        <p:nvSpPr>
-          <p:cNvPr id="10" name="Shape 8"/>
+              <a:rPr lang="en-US" sz="1800" b="1" i="1" dirty="0">
+                <a:solidFill>
+                  <a:srgbClr val="000000"/>
+                </a:solidFill>
+                <a:latin typeface="Fraunces" pitchFamily="34" charset="0"/>
+                <a:ea typeface="Fraunces" pitchFamily="34" charset="-122"/>
+                <a:cs typeface="Fraunces" pitchFamily="34" charset="-120"/>
+              </a:rPr>
+              <a:t>10% a un catalogue de 1 300 produits, mais aucune pub catalogue</a:t>
+            </a:r>
+            <a:endParaRPr lang="en-US" sz="1800" dirty="0"/>
+          </a:p>
+        </p:txBody>
+      </p:sp>
+      <p:sp>
+        <p:nvSpPr>
+          <p:cNvPr id="5" name="Shape 3"/>
           <p:cNvSpPr/>
           <p:nvPr/>
         </p:nvSpPr>
         <p:spPr>
           <a:xfrm>
-            <a:off x="3291840" y="1143000"/>
-            <a:ext cx="2560320" cy="2514600"/>
-          </a:xfrm>
-          <a:prstGeom prst="roundRect">
-            <a:avLst>
-              <a:gd name="adj" fmla="val 5455"/>
-            </a:avLst>
+            <a:off x="320040" y="1234440"/>
+            <a:ext cx="2633472" cy="2240280"/>
+          </a:xfrm>
+          <a:prstGeom prst="rect">
+            <a:avLst/>
           </a:prstGeom>
           <a:solidFill>
             <a:srgbClr val="FFFFFF"/>
           </a:solidFill>
-          <a:ln w="31750">
+          <a:ln w="38100">
             <a:solidFill>
-              <a:srgbClr val="1B1B2F"/>
+              <a:srgbClr val="000000"/>
             </a:solidFill>
             <a:prstDash val="solid"/>
           </a:ln>
-          <a:effectLst>
-            <a:outerShdw sx="100000" sy="100000" kx="0" ky="0" algn="bl" rotWithShape="0" blurRad="101600" dist="63500" dir="2700000">
-              <a:srgbClr val="1B1B2F">
-                <a:alpha val="100000"/>
-              </a:srgbClr>
-            </a:outerShdw>
-          </a:effectLst>
-        </p:spPr>
-      </p:sp>
-      <p:sp>
-        <p:nvSpPr>
-          <p:cNvPr id="11" name="Text 9"/>
+        </p:spPr>
+      </p:sp>
+      <p:sp>
+        <p:nvSpPr>
+          <p:cNvPr id="6" name="Text 4"/>
           <p:cNvSpPr txBox="1"/>
           <p:nvPr/>
         </p:nvSpPr>
         <p:spPr>
           <a:xfrm>
-            <a:off x="3474720" y="1280160"/>
-            <a:ext cx="1005840" cy="347472"/>
-          </a:xfrm>
-          <a:prstGeom prst="roundRect">
-            <a:avLst>
-              <a:gd name="adj" fmla="val 31579"/>
-            </a:avLst>
-          </a:prstGeom>
-          <a:solidFill>
-            <a:srgbClr val="5B5BD6"/>
-          </a:solidFill>
-          <a:ln w="25400">
-            <a:solidFill>
-              <a:srgbClr val="1B1B2F"/>
-            </a:solidFill>
-          </a:ln>
-        </p:spPr>
-        <p:txBody>
-          <a:bodyPr wrap="square" lIns="0" tIns="0" rIns="0" bIns="0" rtlCol="0" anchor="ctr"/>
-          <a:lstStyle/>
-          <a:p>
-            <a:pPr algn="ctr" indent="0" marL="0">
-              <a:buNone/>
-            </a:pPr>
-            <a:r>
-              <a:rPr lang="en-US" sz="1200" b="1" dirty="0">
-                <a:solidFill>
-                  <a:srgbClr val="FFFFFF"/>
-                </a:solidFill>
-                <a:latin typeface="Calibri" pitchFamily="34" charset="0"/>
-                <a:ea typeface="Calibri" pitchFamily="34" charset="-122"/>
-                <a:cs typeface="Calibri" pitchFamily="34" charset="-120"/>
-              </a:rPr>
-              <a:t>Joko</a:t>
-            </a:r>
-            <a:endParaRPr lang="en-US" sz="1200" dirty="0"/>
-          </a:p>
-        </p:txBody>
-      </p:sp>
-      <p:sp>
-        <p:nvSpPr>
-          <p:cNvPr id="12" name="Text 10"/>
-          <p:cNvSpPr txBox="1"/>
-          <p:nvPr/>
-        </p:nvSpPr>
-        <p:spPr>
-          <a:xfrm>
-            <a:off x="3474720" y="1691640"/>
-            <a:ext cx="2194560" cy="868680"/>
+            <a:off x="521208" y="1353312"/>
+            <a:ext cx="2194560" cy="365760"/>
           </a:xfrm>
           <a:prstGeom prst="rect">
             <a:avLst/>
@@ -3851,30 +3480,30 @@
               <a:buNone/>
             </a:pPr>
             <a:r>
-              <a:rPr lang="en-US" sz="6000" b="1" dirty="0">
-                <a:solidFill>
-                  <a:srgbClr val="5B5BD6"/>
-                </a:solidFill>
-                <a:latin typeface="Bookman Old Style" pitchFamily="34" charset="0"/>
-                <a:ea typeface="Bookman Old Style" pitchFamily="34" charset="-122"/>
-                <a:cs typeface="Bookman Old Style" pitchFamily="34" charset="-120"/>
-              </a:rPr>
-              <a:t>7</a:t>
-            </a:r>
-            <a:endParaRPr lang="en-US" sz="6000" dirty="0"/>
-          </a:p>
-        </p:txBody>
-      </p:sp>
-      <p:sp>
-        <p:nvSpPr>
-          <p:cNvPr id="13" name="Text 11"/>
+              <a:rPr lang="en-US" sz="1800" dirty="0">
+                <a:solidFill>
+                  <a:srgbClr val="000000"/>
+                </a:solidFill>
+                <a:latin typeface="Architects Daughter" pitchFamily="34" charset="0"/>
+                <a:ea typeface="Architects Daughter" pitchFamily="34" charset="-122"/>
+                <a:cs typeface="Architects Daughter" pitchFamily="34" charset="-120"/>
+              </a:rPr>
+              <a:t>Ibotta</a:t>
+            </a:r>
+            <a:endParaRPr lang="en-US" sz="1800" dirty="0"/>
+          </a:p>
+        </p:txBody>
+      </p:sp>
+      <p:sp>
+        <p:nvSpPr>
+          <p:cNvPr id="7" name="Text 5"/>
           <p:cNvSpPr txBox="1"/>
           <p:nvPr/>
         </p:nvSpPr>
         <p:spPr>
           <a:xfrm>
-            <a:off x="3474720" y="2560320"/>
-            <a:ext cx="2194560" cy="274320"/>
+            <a:off x="521208" y="1691640"/>
+            <a:ext cx="2194560" cy="777240"/>
           </a:xfrm>
           <a:prstGeom prst="rect">
             <a:avLst/>
@@ -3890,30 +3519,30 @@
               <a:buNone/>
             </a:pPr>
             <a:r>
-              <a:rPr lang="en-US" sz="1300" b="1" dirty="0">
-                <a:solidFill>
-                  <a:srgbClr val="1B1B2F"/>
-                </a:solidFill>
-                <a:latin typeface="Calibri" pitchFamily="34" charset="0"/>
-                <a:ea typeface="Calibri" pitchFamily="34" charset="-122"/>
-                <a:cs typeface="Calibri" pitchFamily="34" charset="-120"/>
-              </a:rPr>
-              <a:t>pubs catalogue</a:t>
-            </a:r>
-            <a:endParaRPr lang="en-US" sz="1300" dirty="0"/>
-          </a:p>
-        </p:txBody>
-      </p:sp>
-      <p:sp>
-        <p:nvSpPr>
-          <p:cNvPr id="14" name="Text 12"/>
+              <a:rPr lang="en-US" sz="5000" b="1" i="1" dirty="0">
+                <a:solidFill>
+                  <a:srgbClr val="BA7A12"/>
+                </a:solidFill>
+                <a:latin typeface="Fraunces" pitchFamily="34" charset="0"/>
+                <a:ea typeface="Fraunces" pitchFamily="34" charset="-122"/>
+                <a:cs typeface="Fraunces" pitchFamily="34" charset="-120"/>
+              </a:rPr>
+              <a:t>32</a:t>
+            </a:r>
+            <a:endParaRPr lang="en-US" sz="5000" dirty="0"/>
+          </a:p>
+        </p:txBody>
+      </p:sp>
+      <p:sp>
+        <p:nvSpPr>
+          <p:cNvPr id="8" name="Text 6"/>
           <p:cNvSpPr txBox="1"/>
           <p:nvPr/>
         </p:nvSpPr>
         <p:spPr>
           <a:xfrm>
-            <a:off x="3474720" y="2852928"/>
-            <a:ext cx="2194560" cy="731520"/>
+            <a:off x="521208" y="2487168"/>
+            <a:ext cx="2240280" cy="274320"/>
           </a:xfrm>
           <a:prstGeom prst="rect">
             <a:avLst/>
@@ -3925,56 +3554,267 @@
           <a:bodyPr wrap="square" lIns="0" tIns="0" rIns="0" bIns="0" rtlCol="0" anchor="t"/>
           <a:lstStyle/>
           <a:p>
-            <a:pPr indent="0" marL="0">
+            <a:pPr algn="l" indent="0" marL="0">
               <a:buNone/>
             </a:pPr>
             <a:r>
-              <a:rPr lang="en-US" sz="1150" dirty="0">
-                <a:solidFill>
-                  <a:srgbClr val="1B1B2F"/>
-                </a:solidFill>
-                <a:latin typeface="Calibri" pitchFamily="34" charset="0"/>
-                <a:ea typeface="Calibri" pitchFamily="34" charset="-122"/>
-                <a:cs typeface="Calibri" pitchFamily="34" charset="-120"/>
-              </a:rPr>
-              <a:t>5 tournent depuis 30+ jours, jusqu'à 188 jours (sa pub la plus ancienne)</a:t>
-            </a:r>
-            <a:endParaRPr lang="en-US" sz="1150" dirty="0"/>
-          </a:p>
-        </p:txBody>
-      </p:sp>
-      <p:sp>
-        <p:nvSpPr>
-          <p:cNvPr id="15" name="Shape 13"/>
+              <a:rPr lang="en-US" sz="1200" b="1" i="1" dirty="0">
+                <a:solidFill>
+                  <a:srgbClr val="000000"/>
+                </a:solidFill>
+                <a:latin typeface="Poppins" pitchFamily="34" charset="0"/>
+                <a:ea typeface="Poppins" pitchFamily="34" charset="-122"/>
+                <a:cs typeface="Poppins" pitchFamily="34" charset="-120"/>
+              </a:rPr>
+              <a:t>pubs catalogue</a:t>
+            </a:r>
+            <a:endParaRPr lang="en-US" sz="1200" dirty="0"/>
+          </a:p>
+        </p:txBody>
+      </p:sp>
+      <p:sp>
+        <p:nvSpPr>
+          <p:cNvPr id="9" name="Text 7"/>
+          <p:cNvSpPr txBox="1"/>
+          <p:nvPr/>
+        </p:nvSpPr>
+        <p:spPr>
+          <a:xfrm>
+            <a:off x="521208" y="2770632"/>
+            <a:ext cx="2240280" cy="658368"/>
+          </a:xfrm>
+          <a:prstGeom prst="rect">
+            <a:avLst/>
+          </a:prstGeom>
+          <a:noFill/>
+          <a:ln/>
+        </p:spPr>
+        <p:txBody>
+          <a:bodyPr wrap="square" lIns="0" tIns="0" rIns="0" bIns="0" rtlCol="0" anchor="t"/>
+          <a:lstStyle/>
+          <a:p>
+            <a:pPr algn="l" indent="0" marL="0">
+              <a:buNone/>
+            </a:pPr>
+            <a:r>
+              <a:rPr lang="en-US" sz="1000" i="1" dirty="0">
+                <a:solidFill>
+                  <a:srgbClr val="333132"/>
+                </a:solidFill>
+                <a:latin typeface="Poppins" pitchFamily="34" charset="0"/>
+                <a:ea typeface="Poppins" pitchFamily="34" charset="-122"/>
+                <a:cs typeface="Poppins" pitchFamily="34" charset="-120"/>
+              </a:rPr>
+              <a:t>20 tournent depuis 30+ jours, la plus ancienne depuis 483 jours</a:t>
+            </a:r>
+            <a:endParaRPr lang="en-US" sz="1000" dirty="0"/>
+          </a:p>
+        </p:txBody>
+      </p:sp>
+      <p:sp>
+        <p:nvSpPr>
+          <p:cNvPr id="10" name="Shape 8"/>
           <p:cNvSpPr/>
           <p:nvPr/>
         </p:nvSpPr>
         <p:spPr>
           <a:xfrm>
-            <a:off x="6126480" y="1143000"/>
-            <a:ext cx="2560320" cy="2514600"/>
-          </a:xfrm>
-          <a:prstGeom prst="roundRect">
-            <a:avLst>
-              <a:gd name="adj" fmla="val 5455"/>
-            </a:avLst>
+            <a:off x="3172968" y="1234440"/>
+            <a:ext cx="2633472" cy="2240280"/>
+          </a:xfrm>
+          <a:prstGeom prst="rect">
+            <a:avLst/>
           </a:prstGeom>
           <a:solidFill>
-            <a:srgbClr val="FFD93D"/>
+            <a:srgbClr val="FFFFFF"/>
           </a:solidFill>
-          <a:ln w="31750">
+          <a:ln w="38100">
             <a:solidFill>
-              <a:srgbClr val="1B1B2F"/>
+              <a:srgbClr val="000000"/>
             </a:solidFill>
             <a:prstDash val="solid"/>
           </a:ln>
-          <a:effectLst>
-            <a:outerShdw sx="100000" sy="100000" kx="0" ky="0" algn="bl" rotWithShape="0" blurRad="101600" dist="63500" dir="2700000">
-              <a:srgbClr val="1B1B2F">
-                <a:alpha val="100000"/>
-              </a:srgbClr>
-            </a:outerShdw>
-          </a:effectLst>
+        </p:spPr>
+      </p:sp>
+      <p:sp>
+        <p:nvSpPr>
+          <p:cNvPr id="11" name="Text 9"/>
+          <p:cNvSpPr txBox="1"/>
+          <p:nvPr/>
+        </p:nvSpPr>
+        <p:spPr>
+          <a:xfrm>
+            <a:off x="3374136" y="1353312"/>
+            <a:ext cx="2194560" cy="365760"/>
+          </a:xfrm>
+          <a:prstGeom prst="rect">
+            <a:avLst/>
+          </a:prstGeom>
+          <a:noFill/>
+          <a:ln/>
+        </p:spPr>
+        <p:txBody>
+          <a:bodyPr wrap="square" lIns="0" tIns="0" rIns="0" bIns="0" rtlCol="0" anchor="ctr"/>
+          <a:lstStyle/>
+          <a:p>
+            <a:pPr indent="0" marL="0">
+              <a:buNone/>
+            </a:pPr>
+            <a:r>
+              <a:rPr lang="en-US" sz="1800" dirty="0">
+                <a:solidFill>
+                  <a:srgbClr val="000000"/>
+                </a:solidFill>
+                <a:latin typeface="Architects Daughter" pitchFamily="34" charset="0"/>
+                <a:ea typeface="Architects Daughter" pitchFamily="34" charset="-122"/>
+                <a:cs typeface="Architects Daughter" pitchFamily="34" charset="-120"/>
+              </a:rPr>
+              <a:t>Joko</a:t>
+            </a:r>
+            <a:endParaRPr lang="en-US" sz="1800" dirty="0"/>
+          </a:p>
+        </p:txBody>
+      </p:sp>
+      <p:sp>
+        <p:nvSpPr>
+          <p:cNvPr id="12" name="Text 10"/>
+          <p:cNvSpPr txBox="1"/>
+          <p:nvPr/>
+        </p:nvSpPr>
+        <p:spPr>
+          <a:xfrm>
+            <a:off x="3374136" y="1691640"/>
+            <a:ext cx="2194560" cy="777240"/>
+          </a:xfrm>
+          <a:prstGeom prst="rect">
+            <a:avLst/>
+          </a:prstGeom>
+          <a:noFill/>
+          <a:ln/>
+        </p:spPr>
+        <p:txBody>
+          <a:bodyPr wrap="square" lIns="0" tIns="0" rIns="0" bIns="0" rtlCol="0" anchor="ctr"/>
+          <a:lstStyle/>
+          <a:p>
+            <a:pPr indent="0" marL="0">
+              <a:buNone/>
+            </a:pPr>
+            <a:r>
+              <a:rPr lang="en-US" sz="5000" b="1" i="1" dirty="0">
+                <a:solidFill>
+                  <a:srgbClr val="005B96"/>
+                </a:solidFill>
+                <a:latin typeface="Fraunces" pitchFamily="34" charset="0"/>
+                <a:ea typeface="Fraunces" pitchFamily="34" charset="-122"/>
+                <a:cs typeface="Fraunces" pitchFamily="34" charset="-120"/>
+              </a:rPr>
+              <a:t>7</a:t>
+            </a:r>
+            <a:endParaRPr lang="en-US" sz="5000" dirty="0"/>
+          </a:p>
+        </p:txBody>
+      </p:sp>
+      <p:sp>
+        <p:nvSpPr>
+          <p:cNvPr id="13" name="Text 11"/>
+          <p:cNvSpPr txBox="1"/>
+          <p:nvPr/>
+        </p:nvSpPr>
+        <p:spPr>
+          <a:xfrm>
+            <a:off x="3374136" y="2487168"/>
+            <a:ext cx="2240280" cy="274320"/>
+          </a:xfrm>
+          <a:prstGeom prst="rect">
+            <a:avLst/>
+          </a:prstGeom>
+          <a:noFill/>
+          <a:ln/>
+        </p:spPr>
+        <p:txBody>
+          <a:bodyPr wrap="square" lIns="0" tIns="0" rIns="0" bIns="0" rtlCol="0" anchor="t"/>
+          <a:lstStyle/>
+          <a:p>
+            <a:pPr algn="l" indent="0" marL="0">
+              <a:buNone/>
+            </a:pPr>
+            <a:r>
+              <a:rPr lang="en-US" sz="1200" b="1" i="1" dirty="0">
+                <a:solidFill>
+                  <a:srgbClr val="000000"/>
+                </a:solidFill>
+                <a:latin typeface="Poppins" pitchFamily="34" charset="0"/>
+                <a:ea typeface="Poppins" pitchFamily="34" charset="-122"/>
+                <a:cs typeface="Poppins" pitchFamily="34" charset="-120"/>
+              </a:rPr>
+              <a:t>pubs catalogue</a:t>
+            </a:r>
+            <a:endParaRPr lang="en-US" sz="1200" dirty="0"/>
+          </a:p>
+        </p:txBody>
+      </p:sp>
+      <p:sp>
+        <p:nvSpPr>
+          <p:cNvPr id="14" name="Text 12"/>
+          <p:cNvSpPr txBox="1"/>
+          <p:nvPr/>
+        </p:nvSpPr>
+        <p:spPr>
+          <a:xfrm>
+            <a:off x="3374136" y="2770632"/>
+            <a:ext cx="2240280" cy="658368"/>
+          </a:xfrm>
+          <a:prstGeom prst="rect">
+            <a:avLst/>
+          </a:prstGeom>
+          <a:noFill/>
+          <a:ln/>
+        </p:spPr>
+        <p:txBody>
+          <a:bodyPr wrap="square" lIns="0" tIns="0" rIns="0" bIns="0" rtlCol="0" anchor="t"/>
+          <a:lstStyle/>
+          <a:p>
+            <a:pPr algn="l" indent="0" marL="0">
+              <a:buNone/>
+            </a:pPr>
+            <a:r>
+              <a:rPr lang="en-US" sz="1000" i="1" dirty="0">
+                <a:solidFill>
+                  <a:srgbClr val="333132"/>
+                </a:solidFill>
+                <a:latin typeface="Poppins" pitchFamily="34" charset="0"/>
+                <a:ea typeface="Poppins" pitchFamily="34" charset="-122"/>
+                <a:cs typeface="Poppins" pitchFamily="34" charset="-120"/>
+              </a:rPr>
+              <a:t>5 tournent depuis 30+ jours, jusqu'à 188 jours (sa pub la plus ancienne)</a:t>
+            </a:r>
+            <a:endParaRPr lang="en-US" sz="1000" dirty="0"/>
+          </a:p>
+        </p:txBody>
+      </p:sp>
+      <p:sp>
+        <p:nvSpPr>
+          <p:cNvPr id="15" name="Shape 13"/>
+          <p:cNvSpPr/>
+          <p:nvPr/>
+        </p:nvSpPr>
+        <p:spPr>
+          <a:xfrm>
+            <a:off x="6025896" y="1234440"/>
+            <a:ext cx="2633472" cy="2240280"/>
+          </a:xfrm>
+          <a:prstGeom prst="rect">
+            <a:avLst/>
+          </a:prstGeom>
+          <a:solidFill>
+            <a:srgbClr val="FFF4CC"/>
+          </a:solidFill>
+          <a:ln w="38100">
+            <a:solidFill>
+              <a:srgbClr val="000000"/>
+            </a:solidFill>
+            <a:prstDash val="solid"/>
+          </a:ln>
         </p:spPr>
       </p:sp>
       <p:sp>
@@ -3985,42 +3825,34 @@
         </p:nvSpPr>
         <p:spPr>
           <a:xfrm>
-            <a:off x="6309360" y="1280160"/>
-            <a:ext cx="1005840" cy="347472"/>
-          </a:xfrm>
-          <a:prstGeom prst="roundRect">
-            <a:avLst>
-              <a:gd name="adj" fmla="val 31579"/>
-            </a:avLst>
-          </a:prstGeom>
-          <a:solidFill>
-            <a:srgbClr val="EF4B4B"/>
-          </a:solidFill>
-          <a:ln w="25400">
-            <a:solidFill>
-              <a:srgbClr val="1B1B2F"/>
-            </a:solidFill>
-          </a:ln>
+            <a:off x="6227064" y="1353312"/>
+            <a:ext cx="2194560" cy="365760"/>
+          </a:xfrm>
+          <a:prstGeom prst="rect">
+            <a:avLst/>
+          </a:prstGeom>
+          <a:noFill/>
+          <a:ln/>
         </p:spPr>
         <p:txBody>
           <a:bodyPr wrap="square" lIns="0" tIns="0" rIns="0" bIns="0" rtlCol="0" anchor="ctr"/>
           <a:lstStyle/>
           <a:p>
-            <a:pPr algn="ctr" indent="0" marL="0">
+            <a:pPr indent="0" marL="0">
               <a:buNone/>
             </a:pPr>
             <a:r>
-              <a:rPr lang="en-US" sz="1200" b="1" dirty="0">
-                <a:solidFill>
-                  <a:srgbClr val="FFFFFF"/>
-                </a:solidFill>
-                <a:latin typeface="Calibri" pitchFamily="34" charset="0"/>
-                <a:ea typeface="Calibri" pitchFamily="34" charset="-122"/>
-                <a:cs typeface="Calibri" pitchFamily="34" charset="-120"/>
+              <a:rPr lang="en-US" sz="1800" dirty="0">
+                <a:solidFill>
+                  <a:srgbClr val="000000"/>
+                </a:solidFill>
+                <a:latin typeface="Architects Daughter" pitchFamily="34" charset="0"/>
+                <a:ea typeface="Architects Daughter" pitchFamily="34" charset="-122"/>
+                <a:cs typeface="Architects Daughter" pitchFamily="34" charset="-120"/>
               </a:rPr>
               <a:t>10%</a:t>
             </a:r>
-            <a:endParaRPr lang="en-US" sz="1200" dirty="0"/>
+            <a:endParaRPr lang="en-US" sz="1800" dirty="0"/>
           </a:p>
         </p:txBody>
       </p:sp>
@@ -4032,8 +3864,8 @@
         </p:nvSpPr>
         <p:spPr>
           <a:xfrm>
-            <a:off x="6309360" y="1691640"/>
-            <a:ext cx="2194560" cy="868680"/>
+            <a:off x="6227064" y="1691640"/>
+            <a:ext cx="2194560" cy="777240"/>
           </a:xfrm>
           <a:prstGeom prst="rect">
             <a:avLst/>
@@ -4049,17 +3881,17 @@
               <a:buNone/>
             </a:pPr>
             <a:r>
-              <a:rPr lang="en-US" sz="6000" b="1" dirty="0">
-                <a:solidFill>
-                  <a:srgbClr val="EF4B4B"/>
-                </a:solidFill>
-                <a:latin typeface="Bookman Old Style" pitchFamily="34" charset="0"/>
-                <a:ea typeface="Bookman Old Style" pitchFamily="34" charset="-122"/>
-                <a:cs typeface="Bookman Old Style" pitchFamily="34" charset="-120"/>
+              <a:rPr lang="en-US" sz="5000" b="1" i="1" dirty="0">
+                <a:solidFill>
+                  <a:srgbClr val="A4193D"/>
+                </a:solidFill>
+                <a:latin typeface="Fraunces" pitchFamily="34" charset="0"/>
+                <a:ea typeface="Fraunces" pitchFamily="34" charset="-122"/>
+                <a:cs typeface="Fraunces" pitchFamily="34" charset="-120"/>
               </a:rPr>
               <a:t>0</a:t>
             </a:r>
-            <a:endParaRPr lang="en-US" sz="6000" dirty="0"/>
+            <a:endParaRPr lang="en-US" sz="5000" dirty="0"/>
           </a:p>
         </p:txBody>
       </p:sp>
@@ -4071,8 +3903,8 @@
         </p:nvSpPr>
         <p:spPr>
           <a:xfrm>
-            <a:off x="6309360" y="2560320"/>
-            <a:ext cx="2194560" cy="274320"/>
+            <a:off x="6227064" y="2487168"/>
+            <a:ext cx="2240280" cy="274320"/>
           </a:xfrm>
           <a:prstGeom prst="rect">
             <a:avLst/>
@@ -4081,24 +3913,24 @@
           <a:ln/>
         </p:spPr>
         <p:txBody>
-          <a:bodyPr wrap="square" lIns="0" tIns="0" rIns="0" bIns="0" rtlCol="0" anchor="ctr"/>
-          <a:lstStyle/>
-          <a:p>
-            <a:pPr indent="0" marL="0">
+          <a:bodyPr wrap="square" lIns="0" tIns="0" rIns="0" bIns="0" rtlCol="0" anchor="t"/>
+          <a:lstStyle/>
+          <a:p>
+            <a:pPr algn="l" indent="0" marL="0">
               <a:buNone/>
             </a:pPr>
             <a:r>
-              <a:rPr lang="en-US" sz="1300" b="1" dirty="0">
-                <a:solidFill>
-                  <a:srgbClr val="1B1B2F"/>
-                </a:solidFill>
-                <a:latin typeface="Calibri" pitchFamily="34" charset="0"/>
-                <a:ea typeface="Calibri" pitchFamily="34" charset="-122"/>
-                <a:cs typeface="Calibri" pitchFamily="34" charset="-120"/>
+              <a:rPr lang="en-US" sz="1200" b="1" i="1" dirty="0">
+                <a:solidFill>
+                  <a:srgbClr val="000000"/>
+                </a:solidFill>
+                <a:latin typeface="Poppins" pitchFamily="34" charset="0"/>
+                <a:ea typeface="Poppins" pitchFamily="34" charset="-122"/>
+                <a:cs typeface="Poppins" pitchFamily="34" charset="-120"/>
               </a:rPr>
               <a:t>pub catalogue</a:t>
             </a:r>
-            <a:endParaRPr lang="en-US" sz="1300" dirty="0"/>
+            <a:endParaRPr lang="en-US" sz="1200" dirty="0"/>
           </a:p>
         </p:txBody>
       </p:sp>
@@ -4110,8 +3942,8 @@
         </p:nvSpPr>
         <p:spPr>
           <a:xfrm>
-            <a:off x="6309360" y="2852928"/>
-            <a:ext cx="2194560" cy="731520"/>
+            <a:off x="6227064" y="2770632"/>
+            <a:ext cx="2240280" cy="658368"/>
           </a:xfrm>
           <a:prstGeom prst="rect">
             <a:avLst/>
@@ -4123,27 +3955,27 @@
           <a:bodyPr wrap="square" lIns="0" tIns="0" rIns="0" bIns="0" rtlCol="0" anchor="t"/>
           <a:lstStyle/>
           <a:p>
-            <a:pPr indent="0" marL="0">
+            <a:pPr algn="l" indent="0" marL="0">
               <a:buNone/>
             </a:pPr>
             <a:r>
-              <a:rPr lang="en-US" sz="1150" dirty="0">
-                <a:solidFill>
-                  <a:srgbClr val="1B1B2F"/>
-                </a:solidFill>
-                <a:latin typeface="Calibri" pitchFamily="34" charset="0"/>
-                <a:ea typeface="Calibri" pitchFamily="34" charset="-122"/>
-                <a:cs typeface="Calibri" pitchFamily="34" charset="-120"/>
+              <a:rPr lang="en-US" sz="1000" i="1" dirty="0">
+                <a:solidFill>
+                  <a:srgbClr val="333132"/>
+                </a:solidFill>
+                <a:latin typeface="Poppins" pitchFamily="34" charset="0"/>
+                <a:ea typeface="Poppins" pitchFamily="34" charset="-122"/>
+                <a:cs typeface="Poppins" pitchFamily="34" charset="-120"/>
               </a:rPr>
               <a:t>…pour 1 300 produits éligibles</a:t>
             </a:r>
-            <a:endParaRPr lang="en-US" sz="1150" dirty="0"/>
+            <a:endParaRPr lang="en-US" sz="1000" dirty="0"/>
           </a:p>
         </p:txBody>
       </p:sp>
       <p:pic>
         <p:nvPicPr>
-          <p:cNvPr id="20" name="Image 0" descr="preencoded.png">    </p:cNvPr>
+          <p:cNvPr id="20" name="Image 0" descr="/tmp/claude-0/-home-user-meta-ads---10-pourcent/a8c37ddd-b273-55c4-b52d-d5d00ba8e18a/scratchpad/deck/img/image70.png">    </p:cNvPr>
           <p:cNvPicPr>
             <a:picLocks noChangeAspect="1"/>
           </p:cNvPicPr>
@@ -4157,8 +3989,8 @@
         </p:blipFill>
         <p:spPr>
           <a:xfrm>
-            <a:off x="502920" y="4023360"/>
-            <a:ext cx="548640" cy="548640"/>
+            <a:off x="365760" y="3611880"/>
+            <a:ext cx="896112" cy="1463040"/>
           </a:xfrm>
           <a:prstGeom prst="rect">
             <a:avLst/>
@@ -4173,8 +4005,8 @@
         </p:nvSpPr>
         <p:spPr>
           <a:xfrm>
-            <a:off x="1234440" y="3931920"/>
-            <a:ext cx="7452360" cy="731520"/>
+            <a:off x="1463040" y="3840480"/>
+            <a:ext cx="7315200" cy="868680"/>
           </a:xfrm>
           <a:prstGeom prst="rect">
             <a:avLst/>
@@ -4186,21 +4018,21 @@
           <a:bodyPr wrap="square" lIns="0" tIns="0" rIns="0" bIns="0" rtlCol="0" anchor="ctr"/>
           <a:lstStyle/>
           <a:p>
-            <a:pPr indent="0" marL="0">
+            <a:pPr algn="l" indent="0" marL="0">
               <a:buNone/>
             </a:pPr>
             <a:r>
-              <a:rPr lang="en-US" sz="1400" b="1" dirty="0">
-                <a:solidFill>
-                  <a:srgbClr val="1B1B2F"/>
-                </a:solidFill>
-                <a:latin typeface="Calibri" pitchFamily="34" charset="0"/>
-                <a:ea typeface="Calibri" pitchFamily="34" charset="-122"/>
-                <a:cs typeface="Calibri" pitchFamily="34" charset="-120"/>
+              <a:rPr lang="en-US" sz="1350" b="1" i="1" dirty="0">
+                <a:solidFill>
+                  <a:srgbClr val="000000"/>
+                </a:solidFill>
+                <a:latin typeface="Poppins" pitchFamily="34" charset="0"/>
+                <a:ea typeface="Poppins" pitchFamily="34" charset="-122"/>
+                <a:cs typeface="Poppins" pitchFamily="34" charset="-120"/>
               </a:rPr>
               <a:t>Avec un flux « 10% remboursés sur [produit] », Meta peut générer des centaines de variantes à partir des visuels que vous avez déjà.</a:t>
             </a:r>
-            <a:endParaRPr lang="en-US" sz="1400" dirty="0"/>
+            <a:endParaRPr lang="en-US" sz="1350" dirty="0"/>
           </a:p>
         </p:txBody>
       </p:sp>
@@ -4218,7 +4050,7 @@
     <p:bg>
       <p:bgPr>
         <a:solidFill>
-          <a:srgbClr val="FFFFFF"/>
+          <a:srgbClr val="FAF9EF"/>
         </a:solidFill>
       </p:bgPr>
     </p:bg>
@@ -4244,138 +4076,345 @@
         </p:nvSpPr>
         <p:spPr>
           <a:xfrm>
-            <a:off x="457200" y="320040"/>
-            <a:ext cx="502920" cy="502920"/>
+            <a:off x="320040" y="320040"/>
+            <a:ext cx="566928" cy="566928"/>
           </a:xfrm>
           <a:prstGeom prst="ellipse">
             <a:avLst/>
           </a:prstGeom>
           <a:solidFill>
-            <a:srgbClr val="EF4B4B"/>
+            <a:srgbClr val="F9C74F"/>
+          </a:solidFill>
+          <a:ln w="31750">
+            <a:solidFill>
+              <a:srgbClr val="000000"/>
+            </a:solidFill>
+            <a:prstDash val="solid"/>
+          </a:ln>
+        </p:spPr>
+      </p:sp>
+      <p:sp>
+        <p:nvSpPr>
+          <p:cNvPr id="3" name="Text 1"/>
+          <p:cNvSpPr txBox="1"/>
+          <p:nvPr/>
+        </p:nvSpPr>
+        <p:spPr>
+          <a:xfrm>
+            <a:off x="320040" y="320040"/>
+            <a:ext cx="566928" cy="566928"/>
+          </a:xfrm>
+          <a:prstGeom prst="rect">
+            <a:avLst/>
+          </a:prstGeom>
+          <a:noFill/>
+          <a:ln/>
+        </p:spPr>
+        <p:txBody>
+          <a:bodyPr wrap="square" lIns="0" tIns="0" rIns="0" bIns="0" rtlCol="0" anchor="ctr"/>
+          <a:lstStyle/>
+          <a:p>
+            <a:pPr algn="ctr" indent="0" marL="0">
+              <a:buNone/>
+            </a:pPr>
+            <a:r>
+              <a:rPr lang="en-US" sz="2400" dirty="0">
+                <a:solidFill>
+                  <a:srgbClr val="000000"/>
+                </a:solidFill>
+                <a:latin typeface="Architects Daughter" pitchFamily="34" charset="0"/>
+                <a:ea typeface="Architects Daughter" pitchFamily="34" charset="-122"/>
+                <a:cs typeface="Architects Daughter" pitchFamily="34" charset="-120"/>
+              </a:rPr>
+              <a:t>4</a:t>
+            </a:r>
+            <a:endParaRPr lang="en-US" sz="2400" dirty="0"/>
+          </a:p>
+        </p:txBody>
+      </p:sp>
+      <p:sp>
+        <p:nvSpPr>
+          <p:cNvPr id="4" name="Text 2"/>
+          <p:cNvSpPr txBox="1"/>
+          <p:nvPr/>
+        </p:nvSpPr>
+        <p:spPr>
+          <a:xfrm>
+            <a:off x="1051560" y="256032"/>
+            <a:ext cx="7772400" cy="868680"/>
+          </a:xfrm>
+          <a:prstGeom prst="roundRect">
+            <a:avLst>
+              <a:gd name="adj" fmla="val 12632"/>
+            </a:avLst>
+          </a:prstGeom>
+          <a:solidFill>
+            <a:srgbClr val="FFFFFF"/>
           </a:solidFill>
           <a:ln w="25400">
             <a:solidFill>
-              <a:srgbClr val="1B1B2F"/>
+              <a:srgbClr val="000000"/>
             </a:solidFill>
-            <a:prstDash val="solid"/>
-          </a:ln>
-        </p:spPr>
-      </p:sp>
-      <p:sp>
-        <p:nvSpPr>
-          <p:cNvPr id="3" name="Text 1"/>
-          <p:cNvSpPr txBox="1"/>
-          <p:nvPr/>
-        </p:nvSpPr>
-        <p:spPr>
-          <a:xfrm>
-            <a:off x="457200" y="320040"/>
-            <a:ext cx="502920" cy="502920"/>
-          </a:xfrm>
-          <a:prstGeom prst="rect">
-            <a:avLst/>
-          </a:prstGeom>
-          <a:noFill/>
-          <a:ln/>
-        </p:spPr>
-        <p:txBody>
-          <a:bodyPr wrap="square" lIns="0" tIns="0" rIns="0" bIns="0" rtlCol="0" anchor="ctr"/>
-          <a:lstStyle/>
-          <a:p>
-            <a:pPr algn="ctr" indent="0" marL="0">
-              <a:buNone/>
-            </a:pPr>
-            <a:r>
-              <a:rPr lang="en-US" sz="2000" b="1" dirty="0">
-                <a:solidFill>
-                  <a:srgbClr val="FFFFFF"/>
-                </a:solidFill>
-                <a:latin typeface="Bookman Old Style" pitchFamily="34" charset="0"/>
-                <a:ea typeface="Bookman Old Style" pitchFamily="34" charset="-122"/>
-                <a:cs typeface="Bookman Old Style" pitchFamily="34" charset="-120"/>
-              </a:rPr>
-              <a:t>4</a:t>
-            </a:r>
-            <a:endParaRPr lang="en-US" sz="2000" dirty="0"/>
-          </a:p>
-        </p:txBody>
-      </p:sp>
-      <p:sp>
-        <p:nvSpPr>
-          <p:cNvPr id="4" name="Text 2"/>
-          <p:cNvSpPr txBox="1"/>
-          <p:nvPr/>
-        </p:nvSpPr>
-        <p:spPr>
-          <a:xfrm>
-            <a:off x="1097280" y="274320"/>
-            <a:ext cx="7589520" cy="822960"/>
-          </a:xfrm>
-          <a:prstGeom prst="rect">
-            <a:avLst/>
-          </a:prstGeom>
-          <a:noFill/>
-          <a:ln/>
-        </p:spPr>
-        <p:txBody>
-          <a:bodyPr wrap="square" lIns="0" tIns="0" rIns="0" bIns="0" rtlCol="0" anchor="ctr"/>
-          <a:lstStyle/>
-          <a:p>
-            <a:pPr indent="0" marL="0">
-              <a:buNone/>
-            </a:pPr>
-            <a:r>
-              <a:rPr lang="en-US" sz="2100" b="1" dirty="0">
-                <a:solidFill>
-                  <a:srgbClr val="1B1B2F"/>
-                </a:solidFill>
-                <a:latin typeface="Bookman Old Style" pitchFamily="34" charset="0"/>
-                <a:ea typeface="Bookman Old Style" pitchFamily="34" charset="-122"/>
-                <a:cs typeface="Bookman Old Style" pitchFamily="34" charset="-120"/>
-              </a:rPr>
-              <a:t>Les marques partenaires sont votre avantage, et Joko arrive sur le terrain des parents</a:t>
-            </a:r>
-            <a:endParaRPr lang="en-US" sz="2100" dirty="0"/>
-          </a:p>
-        </p:txBody>
-      </p:sp>
-      <p:sp>
-        <p:nvSpPr>
-          <p:cNvPr id="5" name="Shape 3"/>
-          <p:cNvSpPr/>
-          <p:nvPr/>
-        </p:nvSpPr>
-        <p:spPr>
-          <a:xfrm>
-            <a:off x="457200" y="1325880"/>
-            <a:ext cx="3931920" cy="1783080"/>
-          </a:xfrm>
-          <a:prstGeom prst="roundRect">
-            <a:avLst>
-              <a:gd name="adj" fmla="val 7692"/>
-            </a:avLst>
-          </a:prstGeom>
-          <a:solidFill>
-            <a:srgbClr val="FFFFFF"/>
-          </a:solidFill>
-          <a:ln w="31750">
-            <a:solidFill>
-              <a:srgbClr val="1B1B2F"/>
-            </a:solidFill>
-            <a:prstDash val="solid"/>
           </a:ln>
           <a:effectLst>
-            <a:outerShdw sx="100000" sy="100000" kx="0" ky="0" algn="bl" rotWithShape="0" blurRad="101600" dist="63500" dir="2700000">
-              <a:srgbClr val="1B1B2F">
+            <a:outerShdw sx="100000" sy="100000" kx="0" ky="0" algn="bl" rotWithShape="0" blurRad="101600" dist="50800" dir="2700000">
+              <a:srgbClr val="000000">
                 <a:alpha val="100000"/>
               </a:srgbClr>
             </a:outerShdw>
           </a:effectLst>
         </p:spPr>
+        <p:txBody>
+          <a:bodyPr wrap="square" lIns="50800" tIns="152400" rIns="152400" bIns="50800" rtlCol="0" anchor="ctr"/>
+          <a:lstStyle/>
+          <a:p>
+            <a:pPr algn="l" indent="0" marL="0">
+              <a:buNone/>
+            </a:pPr>
+            <a:r>
+              <a:rPr lang="en-US" sz="1700" b="1" i="1" dirty="0">
+                <a:solidFill>
+                  <a:srgbClr val="000000"/>
+                </a:solidFill>
+                <a:latin typeface="Fraunces" pitchFamily="34" charset="0"/>
+                <a:ea typeface="Fraunces" pitchFamily="34" charset="-122"/>
+                <a:cs typeface="Fraunces" pitchFamily="34" charset="-120"/>
+              </a:rPr>
+              <a:t>Les marques partenaires sont votre avantage, et Joko arrive sur le terrain des parents</a:t>
+            </a:r>
+            <a:endParaRPr lang="en-US" sz="1700" dirty="0"/>
+          </a:p>
+        </p:txBody>
+      </p:sp>
+      <p:sp>
+        <p:nvSpPr>
+          <p:cNvPr id="5" name="Shape 3"/>
+          <p:cNvSpPr/>
+          <p:nvPr/>
+        </p:nvSpPr>
+        <p:spPr>
+          <a:xfrm>
+            <a:off x="320040" y="1417320"/>
+            <a:ext cx="4069080" cy="1600200"/>
+          </a:xfrm>
+          <a:prstGeom prst="rect">
+            <a:avLst/>
+          </a:prstGeom>
+          <a:solidFill>
+            <a:srgbClr val="FFFFFF"/>
+          </a:solidFill>
+          <a:ln w="38100">
+            <a:solidFill>
+              <a:srgbClr val="000000"/>
+            </a:solidFill>
+            <a:prstDash val="solid"/>
+          </a:ln>
+        </p:spPr>
+      </p:sp>
+      <p:sp>
+        <p:nvSpPr>
+          <p:cNvPr id="6" name="Text 4"/>
+          <p:cNvSpPr txBox="1"/>
+          <p:nvPr/>
+        </p:nvSpPr>
+        <p:spPr>
+          <a:xfrm>
+            <a:off x="502920" y="1508760"/>
+            <a:ext cx="3749040" cy="365760"/>
+          </a:xfrm>
+          <a:prstGeom prst="rect">
+            <a:avLst/>
+          </a:prstGeom>
+          <a:noFill/>
+          <a:ln/>
+        </p:spPr>
+        <p:txBody>
+          <a:bodyPr wrap="square" lIns="0" tIns="0" rIns="0" bIns="0" rtlCol="0" anchor="ctr"/>
+          <a:lstStyle/>
+          <a:p>
+            <a:pPr indent="0" marL="0">
+              <a:buNone/>
+            </a:pPr>
+            <a:r>
+              <a:rPr lang="en-US" sz="1600" dirty="0">
+                <a:solidFill>
+                  <a:srgbClr val="000000"/>
+                </a:solidFill>
+                <a:latin typeface="Architects Daughter" pitchFamily="34" charset="0"/>
+                <a:ea typeface="Architects Daughter" pitchFamily="34" charset="-122"/>
+                <a:cs typeface="Architects Daughter" pitchFamily="34" charset="-120"/>
+              </a:rPr>
+              <a:t>Pubs avec des marques partenaires</a:t>
+            </a:r>
+            <a:endParaRPr lang="en-US" sz="1600" dirty="0"/>
+          </a:p>
+        </p:txBody>
+      </p:sp>
+      <p:sp>
+        <p:nvSpPr>
+          <p:cNvPr id="7" name="Text 5"/>
+          <p:cNvSpPr txBox="1"/>
+          <p:nvPr/>
+        </p:nvSpPr>
+        <p:spPr>
+          <a:xfrm>
+            <a:off x="548640" y="1984248"/>
+            <a:ext cx="914400" cy="384048"/>
+          </a:xfrm>
+          <a:prstGeom prst="roundRect">
+            <a:avLst>
+              <a:gd name="adj" fmla="val 23810"/>
+            </a:avLst>
+          </a:prstGeom>
+          <a:solidFill>
+            <a:srgbClr val="FFFFFF"/>
+          </a:solidFill>
+          <a:ln w="19050">
+            <a:solidFill>
+              <a:srgbClr val="000000"/>
+            </a:solidFill>
+          </a:ln>
+          <a:effectLst>
+            <a:outerShdw sx="100000" sy="100000" kx="0" ky="0" algn="bl" rotWithShape="0" blurRad="101600" dist="50800" dir="2700000">
+              <a:srgbClr val="000000">
+                <a:alpha val="100000"/>
+              </a:srgbClr>
+            </a:outerShdw>
+          </a:effectLst>
+        </p:spPr>
+        <p:txBody>
+          <a:bodyPr wrap="square" lIns="0" tIns="0" rIns="0" bIns="0" rtlCol="0" anchor="ctr"/>
+          <a:lstStyle/>
+          <a:p>
+            <a:pPr algn="ctr" indent="0" marL="0">
+              <a:buNone/>
+            </a:pPr>
+            <a:r>
+              <a:rPr lang="en-US" sz="1050" b="1" i="1" dirty="0">
+                <a:solidFill>
+                  <a:srgbClr val="000000"/>
+                </a:solidFill>
+                <a:latin typeface="Poppins" pitchFamily="34" charset="0"/>
+                <a:ea typeface="Poppins" pitchFamily="34" charset="-122"/>
+                <a:cs typeface="Poppins" pitchFamily="34" charset="-120"/>
+              </a:rPr>
+              <a:t>Gallia</a:t>
+            </a:r>
+            <a:endParaRPr lang="en-US" sz="1050" dirty="0"/>
+          </a:p>
+        </p:txBody>
+      </p:sp>
+      <p:sp>
+        <p:nvSpPr>
+          <p:cNvPr id="8" name="Text 6"/>
+          <p:cNvSpPr txBox="1"/>
+          <p:nvPr/>
+        </p:nvSpPr>
+        <p:spPr>
+          <a:xfrm>
+            <a:off x="1600200" y="1984248"/>
+            <a:ext cx="1051560" cy="384048"/>
+          </a:xfrm>
+          <a:prstGeom prst="roundRect">
+            <a:avLst>
+              <a:gd name="adj" fmla="val 23810"/>
+            </a:avLst>
+          </a:prstGeom>
+          <a:solidFill>
+            <a:srgbClr val="FFFFFF"/>
+          </a:solidFill>
+          <a:ln w="19050">
+            <a:solidFill>
+              <a:srgbClr val="000000"/>
+            </a:solidFill>
+          </a:ln>
+          <a:effectLst>
+            <a:outerShdw sx="100000" sy="100000" kx="0" ky="0" algn="bl" rotWithShape="0" blurRad="101600" dist="50800" dir="2700000">
+              <a:srgbClr val="000000">
+                <a:alpha val="100000"/>
+              </a:srgbClr>
+            </a:outerShdw>
+          </a:effectLst>
+        </p:spPr>
+        <p:txBody>
+          <a:bodyPr wrap="square" lIns="0" tIns="0" rIns="0" bIns="0" rtlCol="0" anchor="ctr"/>
+          <a:lstStyle/>
+          <a:p>
+            <a:pPr algn="ctr" indent="0" marL="0">
+              <a:buNone/>
+            </a:pPr>
+            <a:r>
+              <a:rPr lang="en-US" sz="1050" b="1" i="1" dirty="0">
+                <a:solidFill>
+                  <a:srgbClr val="000000"/>
+                </a:solidFill>
+                <a:latin typeface="Poppins" pitchFamily="34" charset="0"/>
+                <a:ea typeface="Poppins" pitchFamily="34" charset="-122"/>
+                <a:cs typeface="Poppins" pitchFamily="34" charset="-120"/>
+              </a:rPr>
+              <a:t>Blédina</a:t>
+            </a:r>
+            <a:endParaRPr lang="en-US" sz="1050" dirty="0"/>
+          </a:p>
+        </p:txBody>
+      </p:sp>
+      <p:sp>
+        <p:nvSpPr>
+          <p:cNvPr id="9" name="Text 7"/>
+          <p:cNvSpPr txBox="1"/>
+          <p:nvPr/>
+        </p:nvSpPr>
+        <p:spPr>
+          <a:xfrm>
+            <a:off x="2788920" y="1984248"/>
+            <a:ext cx="1463040" cy="384048"/>
+          </a:xfrm>
+          <a:prstGeom prst="roundRect">
+            <a:avLst>
+              <a:gd name="adj" fmla="val 23810"/>
+            </a:avLst>
+          </a:prstGeom>
+          <a:solidFill>
+            <a:srgbClr val="FFFFFF"/>
+          </a:solidFill>
+          <a:ln w="19050">
+            <a:solidFill>
+              <a:srgbClr val="000000"/>
+            </a:solidFill>
+          </a:ln>
+          <a:effectLst>
+            <a:outerShdw sx="100000" sy="100000" kx="0" ky="0" algn="bl" rotWithShape="0" blurRad="101600" dist="50800" dir="2700000">
+              <a:srgbClr val="000000">
+                <a:alpha val="100000"/>
+              </a:srgbClr>
+            </a:outerShdw>
+          </a:effectLst>
+        </p:spPr>
+        <p:txBody>
+          <a:bodyPr wrap="square" lIns="0" tIns="0" rIns="0" bIns="0" rtlCol="0" anchor="ctr"/>
+          <a:lstStyle/>
+          <a:p>
+            <a:pPr algn="ctr" indent="0" marL="0">
+              <a:buNone/>
+            </a:pPr>
+            <a:r>
+              <a:rPr lang="en-US" sz="1050" b="1" i="1" dirty="0">
+                <a:solidFill>
+                  <a:srgbClr val="000000"/>
+                </a:solidFill>
+                <a:latin typeface="Poppins" pitchFamily="34" charset="0"/>
+                <a:ea typeface="Poppins" pitchFamily="34" charset="-122"/>
+                <a:cs typeface="Poppins" pitchFamily="34" charset="-120"/>
+              </a:rPr>
+              <a:t>Le Petit Basque</a:t>
+            </a:r>
+            <a:endParaRPr lang="en-US" sz="1050" dirty="0"/>
+          </a:p>
+        </p:txBody>
       </p:sp>
       <p:pic>
         <p:nvPicPr>
-          <p:cNvPr id="6" name="Image 0" descr="preencoded.png">    </p:cNvPr>
+          <p:cNvPr id="10" name="Image 0" descr="/tmp/claude-0/-home-user-meta-ads---10-pourcent/a8c37ddd-b273-55c4-b52d-d5d00ba8e18a/scratchpad/deck/img/image6.png">    </p:cNvPr>
           <p:cNvPicPr>
             <a:picLocks noChangeAspect="1"/>
           </p:cNvPicPr>
@@ -4389,8 +4428,8 @@
         </p:blipFill>
         <p:spPr>
           <a:xfrm>
-            <a:off x="640080" y="1463040"/>
-            <a:ext cx="457200" cy="457200"/>
+            <a:off x="548640" y="2560320"/>
+            <a:ext cx="274320" cy="274320"/>
           </a:xfrm>
           <a:prstGeom prst="rect">
             <a:avLst/>
@@ -4399,14 +4438,14 @@
       </p:pic>
       <p:sp>
         <p:nvSpPr>
-          <p:cNvPr id="7" name="Text 4"/>
+          <p:cNvPr id="11" name="Text 8"/>
           <p:cNvSpPr txBox="1"/>
           <p:nvPr/>
         </p:nvSpPr>
         <p:spPr>
           <a:xfrm>
-            <a:off x="1234440" y="1463040"/>
-            <a:ext cx="3017520" cy="457200"/>
+            <a:off x="914400" y="2542032"/>
+            <a:ext cx="3291840" cy="320040"/>
           </a:xfrm>
           <a:prstGeom prst="rect">
             <a:avLst/>
@@ -4418,241 +4457,275 @@
           <a:bodyPr wrap="square" lIns="0" tIns="0" rIns="0" bIns="0" rtlCol="0" anchor="ctr"/>
           <a:lstStyle/>
           <a:p>
+            <a:pPr algn="l" indent="0" marL="0">
+              <a:buNone/>
+            </a:pPr>
+            <a:r>
+              <a:rPr lang="en-US" sz="1100" i="1" dirty="0">
+                <a:solidFill>
+                  <a:srgbClr val="333132"/>
+                </a:solidFill>
+                <a:latin typeface="Poppins" pitchFamily="34" charset="0"/>
+                <a:ea typeface="Poppins" pitchFamily="34" charset="-122"/>
+                <a:cs typeface="Poppins" pitchFamily="34" charset="-120"/>
+              </a:rPr>
+              <a:t>10% est le seul des trois à en faire.</a:t>
+            </a:r>
+            <a:endParaRPr lang="en-US" sz="1100" dirty="0"/>
+          </a:p>
+        </p:txBody>
+      </p:sp>
+      <p:sp>
+        <p:nvSpPr>
+          <p:cNvPr id="12" name="Shape 9"/>
+          <p:cNvSpPr/>
+          <p:nvPr/>
+        </p:nvSpPr>
+        <p:spPr>
+          <a:xfrm>
+            <a:off x="4754880" y="1417320"/>
+            <a:ext cx="4069080" cy="1600200"/>
+          </a:xfrm>
+          <a:prstGeom prst="rect">
+            <a:avLst/>
+          </a:prstGeom>
+          <a:solidFill>
+            <a:srgbClr val="FFFFFF"/>
+          </a:solidFill>
+          <a:ln w="38100">
+            <a:solidFill>
+              <a:srgbClr val="000000"/>
+            </a:solidFill>
+            <a:prstDash val="solid"/>
+          </a:ln>
+        </p:spPr>
+      </p:sp>
+      <p:sp>
+        <p:nvSpPr>
+          <p:cNvPr id="13" name="Text 10"/>
+          <p:cNvSpPr txBox="1"/>
+          <p:nvPr/>
+        </p:nvSpPr>
+        <p:spPr>
+          <a:xfrm>
+            <a:off x="4937760" y="1463040"/>
+            <a:ext cx="3657600" cy="685800"/>
+          </a:xfrm>
+          <a:prstGeom prst="rect">
+            <a:avLst/>
+          </a:prstGeom>
+          <a:noFill/>
+          <a:ln/>
+        </p:spPr>
+        <p:txBody>
+          <a:bodyPr wrap="square" lIns="0" tIns="0" rIns="0" bIns="0" rtlCol="0" anchor="ctr"/>
+          <a:lstStyle/>
+          <a:p>
             <a:pPr indent="0" marL="0">
               <a:buNone/>
             </a:pPr>
             <a:r>
-              <a:rPr lang="en-US" sz="1300" b="1" dirty="0">
-                <a:solidFill>
-                  <a:srgbClr val="1B1B2F"/>
-                </a:solidFill>
-                <a:latin typeface="Calibri" pitchFamily="34" charset="0"/>
-                <a:ea typeface="Calibri" pitchFamily="34" charset="-122"/>
-                <a:cs typeface="Calibri" pitchFamily="34" charset="-120"/>
-              </a:rPr>
-              <a:t>Pubs avec des marques partenaires</a:t>
-            </a:r>
-            <a:endParaRPr lang="en-US" sz="1300" dirty="0"/>
-          </a:p>
-        </p:txBody>
-      </p:sp>
-      <p:sp>
-        <p:nvSpPr>
-          <p:cNvPr id="8" name="Text 5"/>
+              <a:rPr lang="en-US" sz="4000" b="1" i="1" dirty="0">
+                <a:solidFill>
+                  <a:srgbClr val="005B96"/>
+                </a:solidFill>
+                <a:latin typeface="Fraunces" pitchFamily="34" charset="0"/>
+                <a:ea typeface="Fraunces" pitchFamily="34" charset="-122"/>
+                <a:cs typeface="Fraunces" pitchFamily="34" charset="-120"/>
+              </a:rPr>
+              <a:t>5</a:t>
+            </a:r>
+            <a:pPr indent="0" marL="0">
+              <a:buNone/>
+            </a:pPr>
+            <a:r>
+              <a:rPr lang="en-US" sz="2200" b="1" i="1" dirty="0">
+                <a:solidFill>
+                  <a:srgbClr val="000000"/>
+                </a:solidFill>
+                <a:latin typeface="Fraunces" pitchFamily="34" charset="0"/>
+                <a:ea typeface="Fraunces" pitchFamily="34" charset="-122"/>
+                <a:cs typeface="Fraunces" pitchFamily="34" charset="-120"/>
+              </a:rPr>
+              <a:t> / 13</a:t>
+            </a:r>
+            <a:endParaRPr lang="en-US" sz="4000" dirty="0"/>
+          </a:p>
+        </p:txBody>
+      </p:sp>
+      <p:sp>
+        <p:nvSpPr>
+          <p:cNvPr id="14" name="Text 11"/>
           <p:cNvSpPr txBox="1"/>
           <p:nvPr/>
         </p:nvSpPr>
         <p:spPr>
           <a:xfrm>
-            <a:off x="640080" y="2148840"/>
-            <a:ext cx="868680" cy="384048"/>
-          </a:xfrm>
-          <a:prstGeom prst="roundRect">
-            <a:avLst>
-              <a:gd name="adj" fmla="val 35714"/>
-            </a:avLst>
+            <a:off x="4937760" y="2194560"/>
+            <a:ext cx="3703320" cy="731520"/>
+          </a:xfrm>
+          <a:prstGeom prst="rect">
+            <a:avLst/>
+          </a:prstGeom>
+          <a:noFill/>
+          <a:ln/>
+        </p:spPr>
+        <p:txBody>
+          <a:bodyPr wrap="square" lIns="0" tIns="0" rIns="0" bIns="0" rtlCol="0" anchor="t"/>
+          <a:lstStyle/>
+          <a:p>
+            <a:pPr algn="l" indent="0" marL="0">
+              <a:buNone/>
+            </a:pPr>
+            <a:r>
+              <a:rPr lang="en-US" sz="1150" i="1" dirty="0">
+                <a:solidFill>
+                  <a:srgbClr val="333132"/>
+                </a:solidFill>
+                <a:latin typeface="Poppins" pitchFamily="34" charset="0"/>
+                <a:ea typeface="Poppins" pitchFamily="34" charset="-122"/>
+                <a:cs typeface="Poppins" pitchFamily="34" charset="-120"/>
+              </a:rPr>
+              <a:t>nouvelles vidéos créateurs de Joko (30 septembre) racontent des histoires de mamans.</a:t>
+            </a:r>
+            <a:endParaRPr lang="en-US" sz="1150" dirty="0"/>
+          </a:p>
+        </p:txBody>
+      </p:sp>
+      <p:sp>
+        <p:nvSpPr>
+          <p:cNvPr id="15" name="Text 12"/>
+          <p:cNvSpPr txBox="1"/>
+          <p:nvPr/>
+        </p:nvSpPr>
+        <p:spPr>
+          <a:xfrm>
+            <a:off x="320040" y="3154680"/>
+            <a:ext cx="7223760" cy="548640"/>
+          </a:xfrm>
+          <a:prstGeom prst="rect">
+            <a:avLst/>
+          </a:prstGeom>
+          <a:noFill/>
+          <a:ln/>
+        </p:spPr>
+        <p:txBody>
+          <a:bodyPr wrap="square" lIns="0" tIns="0" rIns="0" bIns="0" rtlCol="0" anchor="ctr"/>
+          <a:lstStyle/>
+          <a:p>
+            <a:pPr algn="l" indent="0" marL="0">
+              <a:buNone/>
+            </a:pPr>
+            <a:r>
+              <a:rPr lang="en-US" sz="1250" b="1" i="1" dirty="0">
+                <a:solidFill>
+                  <a:srgbClr val="000000"/>
+                </a:solidFill>
+                <a:latin typeface="Poppins" pitchFamily="34" charset="0"/>
+                <a:ea typeface="Poppins" pitchFamily="34" charset="-122"/>
+                <a:cs typeface="Poppins" pitchFamily="34" charset="-120"/>
+              </a:rPr>
+              <a:t>Des Partnership Ads avec deux ou trois marques partenaires, financées par elles, permettraient de garder ce terrain.</a:t>
+            </a:r>
+            <a:endParaRPr lang="en-US" sz="1250" dirty="0"/>
+          </a:p>
+        </p:txBody>
+      </p:sp>
+      <p:sp>
+        <p:nvSpPr>
+          <p:cNvPr id="16" name="Shape 13"/>
+          <p:cNvSpPr/>
+          <p:nvPr/>
+        </p:nvSpPr>
+        <p:spPr>
+          <a:xfrm>
+            <a:off x="320040" y="3840480"/>
+            <a:ext cx="7086600" cy="960120"/>
+          </a:xfrm>
+          <a:prstGeom prst="rect">
+            <a:avLst/>
           </a:prstGeom>
           <a:solidFill>
-            <a:srgbClr val="FFD93D"/>
+            <a:srgbClr val="FFFFFF"/>
           </a:solidFill>
           <a:ln w="25400">
             <a:solidFill>
-              <a:srgbClr val="1B1B2F"/>
-            </a:solidFill>
-          </a:ln>
-        </p:spPr>
-        <p:txBody>
-          <a:bodyPr wrap="square" lIns="0" tIns="0" rIns="0" bIns="0" rtlCol="0" anchor="ctr"/>
-          <a:lstStyle/>
-          <a:p>
-            <a:pPr algn="ctr" indent="0" marL="0">
-              <a:buNone/>
-            </a:pPr>
-            <a:r>
-              <a:rPr lang="en-US" sz="1200" b="1" dirty="0">
-                <a:solidFill>
-                  <a:srgbClr val="1B1B2F"/>
-                </a:solidFill>
-                <a:latin typeface="Calibri" pitchFamily="34" charset="0"/>
-                <a:ea typeface="Calibri" pitchFamily="34" charset="-122"/>
-                <a:cs typeface="Calibri" pitchFamily="34" charset="-120"/>
-              </a:rPr>
-              <a:t>Gallia</a:t>
-            </a:r>
-            <a:endParaRPr lang="en-US" sz="1200" dirty="0"/>
-          </a:p>
-        </p:txBody>
-      </p:sp>
-      <p:sp>
-        <p:nvSpPr>
-          <p:cNvPr id="9" name="Text 6"/>
-          <p:cNvSpPr txBox="1"/>
-          <p:nvPr/>
-        </p:nvSpPr>
-        <p:spPr>
-          <a:xfrm>
-            <a:off x="1600200" y="2148840"/>
-            <a:ext cx="960120" cy="384048"/>
-          </a:xfrm>
-          <a:prstGeom prst="roundRect">
-            <a:avLst>
-              <a:gd name="adj" fmla="val 35714"/>
-            </a:avLst>
-          </a:prstGeom>
-          <a:solidFill>
-            <a:srgbClr val="FFD93D"/>
-          </a:solidFill>
-          <a:ln w="25400">
-            <a:solidFill>
-              <a:srgbClr val="1B1B2F"/>
-            </a:solidFill>
-          </a:ln>
-        </p:spPr>
-        <p:txBody>
-          <a:bodyPr wrap="square" lIns="0" tIns="0" rIns="0" bIns="0" rtlCol="0" anchor="ctr"/>
-          <a:lstStyle/>
-          <a:p>
-            <a:pPr algn="ctr" indent="0" marL="0">
-              <a:buNone/>
-            </a:pPr>
-            <a:r>
-              <a:rPr lang="en-US" sz="1200" b="1" dirty="0">
-                <a:solidFill>
-                  <a:srgbClr val="1B1B2F"/>
-                </a:solidFill>
-                <a:latin typeface="Calibri" pitchFamily="34" charset="0"/>
-                <a:ea typeface="Calibri" pitchFamily="34" charset="-122"/>
-                <a:cs typeface="Calibri" pitchFamily="34" charset="-120"/>
-              </a:rPr>
-              <a:t>Blédina</a:t>
-            </a:r>
-            <a:endParaRPr lang="en-US" sz="1200" dirty="0"/>
-          </a:p>
-        </p:txBody>
-      </p:sp>
-      <p:sp>
-        <p:nvSpPr>
-          <p:cNvPr id="10" name="Text 7"/>
-          <p:cNvSpPr txBox="1"/>
-          <p:nvPr/>
-        </p:nvSpPr>
-        <p:spPr>
-          <a:xfrm>
-            <a:off x="2651760" y="2148840"/>
-            <a:ext cx="1600200" cy="384048"/>
-          </a:xfrm>
-          <a:prstGeom prst="roundRect">
-            <a:avLst>
-              <a:gd name="adj" fmla="val 35714"/>
-            </a:avLst>
-          </a:prstGeom>
-          <a:solidFill>
-            <a:srgbClr val="FFD93D"/>
-          </a:solidFill>
-          <a:ln w="25400">
-            <a:solidFill>
-              <a:srgbClr val="1B1B2F"/>
-            </a:solidFill>
-          </a:ln>
-        </p:spPr>
-        <p:txBody>
-          <a:bodyPr wrap="square" lIns="0" tIns="0" rIns="0" bIns="0" rtlCol="0" anchor="ctr"/>
-          <a:lstStyle/>
-          <a:p>
-            <a:pPr algn="ctr" indent="0" marL="0">
-              <a:buNone/>
-            </a:pPr>
-            <a:r>
-              <a:rPr lang="en-US" sz="1200" b="1" dirty="0">
-                <a:solidFill>
-                  <a:srgbClr val="1B1B2F"/>
-                </a:solidFill>
-                <a:latin typeface="Calibri" pitchFamily="34" charset="0"/>
-                <a:ea typeface="Calibri" pitchFamily="34" charset="-122"/>
-                <a:cs typeface="Calibri" pitchFamily="34" charset="-120"/>
-              </a:rPr>
-              <a:t>Le Petit Basque</a:t>
-            </a:r>
-            <a:endParaRPr lang="en-US" sz="1200" dirty="0"/>
-          </a:p>
-        </p:txBody>
-      </p:sp>
-      <p:sp>
-        <p:nvSpPr>
-          <p:cNvPr id="11" name="Text 8"/>
-          <p:cNvSpPr txBox="1"/>
-          <p:nvPr/>
-        </p:nvSpPr>
-        <p:spPr>
-          <a:xfrm>
-            <a:off x="640080" y="2651760"/>
-            <a:ext cx="3566160" cy="320040"/>
-          </a:xfrm>
-          <a:prstGeom prst="rect">
-            <a:avLst/>
-          </a:prstGeom>
-          <a:noFill/>
-          <a:ln/>
-        </p:spPr>
-        <p:txBody>
-          <a:bodyPr wrap="square" lIns="0" tIns="0" rIns="0" bIns="0" rtlCol="0" anchor="ctr"/>
-          <a:lstStyle/>
-          <a:p>
-            <a:pPr indent="0" marL="0">
-              <a:buNone/>
-            </a:pPr>
-            <a:r>
-              <a:rPr lang="en-US" sz="1150" dirty="0">
-                <a:solidFill>
-                  <a:srgbClr val="5A5A6E"/>
-                </a:solidFill>
-                <a:latin typeface="Calibri" pitchFamily="34" charset="0"/>
-                <a:ea typeface="Calibri" pitchFamily="34" charset="-122"/>
-                <a:cs typeface="Calibri" pitchFamily="34" charset="-120"/>
-              </a:rPr>
-              <a:t>10% est le seul des trois à en faire.</a:t>
-            </a:r>
-            <a:endParaRPr lang="en-US" sz="1150" dirty="0"/>
-          </a:p>
-        </p:txBody>
-      </p:sp>
-      <p:sp>
-        <p:nvSpPr>
-          <p:cNvPr id="12" name="Shape 9"/>
-          <p:cNvSpPr/>
-          <p:nvPr/>
-        </p:nvSpPr>
-        <p:spPr>
-          <a:xfrm>
-            <a:off x="4754880" y="1325880"/>
-            <a:ext cx="3931920" cy="1783080"/>
-          </a:xfrm>
-          <a:prstGeom prst="roundRect">
-            <a:avLst>
-              <a:gd name="adj" fmla="val 7692"/>
-            </a:avLst>
-          </a:prstGeom>
-          <a:solidFill>
-            <a:srgbClr val="FFFFFF"/>
-          </a:solidFill>
-          <a:ln w="31750">
-            <a:solidFill>
-              <a:srgbClr val="1B1B2F"/>
+              <a:srgbClr val="000000"/>
             </a:solidFill>
             <a:prstDash val="solid"/>
           </a:ln>
-          <a:effectLst>
-            <a:outerShdw sx="100000" sy="100000" kx="0" ky="0" algn="bl" rotWithShape="0" blurRad="101600" dist="63500" dir="2700000">
-              <a:srgbClr val="1B1B2F">
-                <a:alpha val="100000"/>
-              </a:srgbClr>
-            </a:outerShdw>
-          </a:effectLst>
-        </p:spPr>
+        </p:spPr>
+      </p:sp>
+      <p:sp>
+        <p:nvSpPr>
+          <p:cNvPr id="17" name="Text 14"/>
+          <p:cNvSpPr txBox="1"/>
+          <p:nvPr/>
+        </p:nvSpPr>
+        <p:spPr>
+          <a:xfrm>
+            <a:off x="502920" y="3886200"/>
+            <a:ext cx="6766560" cy="868680"/>
+          </a:xfrm>
+          <a:prstGeom prst="rect">
+            <a:avLst/>
+          </a:prstGeom>
+          <a:noFill/>
+          <a:ln/>
+        </p:spPr>
+        <p:txBody>
+          <a:bodyPr wrap="square" lIns="0" tIns="0" rIns="0" bIns="0" rtlCol="0" anchor="ctr"/>
+          <a:lstStyle/>
+          <a:p>
+            <a:pPr indent="0" marL="0">
+              <a:buNone/>
+            </a:pPr>
+            <a:r>
+              <a:rPr lang="en-US" sz="1050" b="1" i="1" dirty="0">
+                <a:solidFill>
+                  <a:srgbClr val="333132"/>
+                </a:solidFill>
+                <a:latin typeface="Poppins" pitchFamily="34" charset="0"/>
+                <a:ea typeface="Poppins" pitchFamily="34" charset="-122"/>
+                <a:cs typeface="Poppins" pitchFamily="34" charset="-120"/>
+              </a:rPr>
+              <a:t>Méthode : </a:t>
+            </a:r>
+            <a:pPr indent="0" marL="0">
+              <a:buNone/>
+            </a:pPr>
+            <a:r>
+              <a:rPr lang="en-US" sz="1050" i="1" dirty="0">
+                <a:solidFill>
+                  <a:srgbClr val="333132"/>
+                </a:solidFill>
+                <a:latin typeface="Poppins" pitchFamily="34" charset="0"/>
+                <a:ea typeface="Poppins" pitchFamily="34" charset="-122"/>
+                <a:cs typeface="Poppins" pitchFamily="34" charset="-120"/>
+              </a:rPr>
+              <a:t>scraping avec Apify, transcription avec Whisper, classification testée avec Jev (TypeSafe) puis faite avec Claude, et vérifiée à la main. </a:t>
+            </a:r>
+            <a:pPr indent="0" marL="0">
+              <a:buNone/>
+            </a:pPr>
+            <a:r>
+              <a:rPr lang="en-US" sz="1050" b="1" i="1" dirty="0">
+                <a:solidFill>
+                  <a:srgbClr val="A4193D"/>
+                </a:solidFill>
+                <a:latin typeface="Poppins" pitchFamily="34" charset="0"/>
+                <a:ea typeface="Poppins" pitchFamily="34" charset="-122"/>
+                <a:cs typeface="Poppins" pitchFamily="34" charset="-120"/>
+              </a:rPr>
+              <a:t>Les données sont ici : [lien Google Sheet]</a:t>
+            </a:r>
+            <a:endParaRPr lang="en-US" sz="1050" dirty="0"/>
+          </a:p>
+        </p:txBody>
       </p:sp>
       <p:pic>
         <p:nvPicPr>
-          <p:cNvPr id="13" name="Image 1" descr="preencoded.png">    </p:cNvPr>
+          <p:cNvPr id="18" name="Image 1" descr="/tmp/claude-0/-home-user-meta-ads---10-pourcent/a8c37ddd-b273-55c4-b52d-d5d00ba8e18a/scratchpad/deck/img/image10.png">    </p:cNvPr>
           <p:cNvPicPr>
             <a:picLocks noChangeAspect="1"/>
           </p:cNvPicPr>
@@ -4666,239 +4739,14 @@
         </p:blipFill>
         <p:spPr>
           <a:xfrm>
-            <a:off x="4937760" y="1463040"/>
-            <a:ext cx="457200" cy="457200"/>
+            <a:off x="7726680" y="3154680"/>
+            <a:ext cx="1097280" cy="1783080"/>
           </a:xfrm>
           <a:prstGeom prst="rect">
             <a:avLst/>
           </a:prstGeom>
         </p:spPr>
       </p:pic>
-      <p:sp>
-        <p:nvSpPr>
-          <p:cNvPr id="14" name="Text 10"/>
-          <p:cNvSpPr txBox="1"/>
-          <p:nvPr/>
-        </p:nvSpPr>
-        <p:spPr>
-          <a:xfrm>
-            <a:off x="5532120" y="1417320"/>
-            <a:ext cx="3017520" cy="640080"/>
-          </a:xfrm>
-          <a:prstGeom prst="rect">
-            <a:avLst/>
-          </a:prstGeom>
-          <a:noFill/>
-          <a:ln/>
-        </p:spPr>
-        <p:txBody>
-          <a:bodyPr wrap="square" lIns="0" tIns="0" rIns="0" bIns="0" rtlCol="0" anchor="ctr"/>
-          <a:lstStyle/>
-          <a:p>
-            <a:pPr indent="0" marL="0">
-              <a:buNone/>
-            </a:pPr>
-            <a:r>
-              <a:rPr lang="en-US" sz="4000" b="1" dirty="0">
-                <a:solidFill>
-                  <a:srgbClr val="5B5BD6"/>
-                </a:solidFill>
-                <a:latin typeface="Bookman Old Style" pitchFamily="34" charset="0"/>
-                <a:ea typeface="Bookman Old Style" pitchFamily="34" charset="-122"/>
-                <a:cs typeface="Bookman Old Style" pitchFamily="34" charset="-120"/>
-              </a:rPr>
-              <a:t>5</a:t>
-            </a:r>
-            <a:pPr indent="0" marL="0">
-              <a:buNone/>
-            </a:pPr>
-            <a:r>
-              <a:rPr lang="en-US" sz="2200" b="1" dirty="0">
-                <a:solidFill>
-                  <a:srgbClr val="1B1B2F"/>
-                </a:solidFill>
-                <a:latin typeface="Bookman Old Style" pitchFamily="34" charset="0"/>
-                <a:ea typeface="Bookman Old Style" pitchFamily="34" charset="-122"/>
-                <a:cs typeface="Bookman Old Style" pitchFamily="34" charset="-120"/>
-              </a:rPr>
-              <a:t> / 13</a:t>
-            </a:r>
-            <a:endParaRPr lang="en-US" sz="4000" dirty="0"/>
-          </a:p>
-        </p:txBody>
-      </p:sp>
-      <p:sp>
-        <p:nvSpPr>
-          <p:cNvPr id="15" name="Text 11"/>
-          <p:cNvSpPr txBox="1"/>
-          <p:nvPr/>
-        </p:nvSpPr>
-        <p:spPr>
-          <a:xfrm>
-            <a:off x="4937760" y="2148840"/>
-            <a:ext cx="3566160" cy="822960"/>
-          </a:xfrm>
-          <a:prstGeom prst="rect">
-            <a:avLst/>
-          </a:prstGeom>
-          <a:noFill/>
-          <a:ln/>
-        </p:spPr>
-        <p:txBody>
-          <a:bodyPr wrap="square" lIns="0" tIns="0" rIns="0" bIns="0" rtlCol="0" anchor="t"/>
-          <a:lstStyle/>
-          <a:p>
-            <a:pPr indent="0" marL="0">
-              <a:buNone/>
-            </a:pPr>
-            <a:r>
-              <a:rPr lang="en-US" sz="1250" dirty="0">
-                <a:solidFill>
-                  <a:srgbClr val="1B1B2F"/>
-                </a:solidFill>
-                <a:latin typeface="Calibri" pitchFamily="34" charset="0"/>
-                <a:ea typeface="Calibri" pitchFamily="34" charset="-122"/>
-                <a:cs typeface="Calibri" pitchFamily="34" charset="-120"/>
-              </a:rPr>
-              <a:t>nouvelles vidéos créateurs de Joko (30 septembre) racontent des histoires de mamans.</a:t>
-            </a:r>
-            <a:endParaRPr lang="en-US" sz="1250" dirty="0"/>
-          </a:p>
-        </p:txBody>
-      </p:sp>
-      <p:sp>
-        <p:nvSpPr>
-          <p:cNvPr id="16" name="Text 12"/>
-          <p:cNvSpPr txBox="1"/>
-          <p:nvPr/>
-        </p:nvSpPr>
-        <p:spPr>
-          <a:xfrm>
-            <a:off x="457200" y="3291840"/>
-            <a:ext cx="8229600" cy="411480"/>
-          </a:xfrm>
-          <a:prstGeom prst="rect">
-            <a:avLst/>
-          </a:prstGeom>
-          <a:noFill/>
-          <a:ln/>
-        </p:spPr>
-        <p:txBody>
-          <a:bodyPr wrap="square" lIns="0" tIns="0" rIns="0" bIns="0" rtlCol="0" anchor="ctr"/>
-          <a:lstStyle/>
-          <a:p>
-            <a:pPr indent="0" marL="0">
-              <a:buNone/>
-            </a:pPr>
-            <a:r>
-              <a:rPr lang="en-US" sz="1400" b="1" dirty="0">
-                <a:solidFill>
-                  <a:srgbClr val="1B1B2F"/>
-                </a:solidFill>
-                <a:latin typeface="Calibri" pitchFamily="34" charset="0"/>
-                <a:ea typeface="Calibri" pitchFamily="34" charset="-122"/>
-                <a:cs typeface="Calibri" pitchFamily="34" charset="-120"/>
-              </a:rPr>
-              <a:t>Des Partnership Ads avec deux ou trois marques partenaires, financées par elles, permettraient de garder ce terrain.</a:t>
-            </a:r>
-            <a:endParaRPr lang="en-US" sz="1400" dirty="0"/>
-          </a:p>
-        </p:txBody>
-      </p:sp>
-      <p:sp>
-        <p:nvSpPr>
-          <p:cNvPr id="17" name="Shape 13"/>
-          <p:cNvSpPr/>
-          <p:nvPr/>
-        </p:nvSpPr>
-        <p:spPr>
-          <a:xfrm>
-            <a:off x="457200" y="3931920"/>
-            <a:ext cx="8229600" cy="822960"/>
-          </a:xfrm>
-          <a:prstGeom prst="roundRect">
-            <a:avLst>
-              <a:gd name="adj" fmla="val 13333"/>
-            </a:avLst>
-          </a:prstGeom>
-          <a:solidFill>
-            <a:srgbClr val="F2F2F6"/>
-          </a:solidFill>
-          <a:ln w="19050">
-            <a:solidFill>
-              <a:srgbClr val="1B1B2F"/>
-            </a:solidFill>
-            <a:prstDash val="solid"/>
-          </a:ln>
-        </p:spPr>
-      </p:sp>
-      <p:sp>
-        <p:nvSpPr>
-          <p:cNvPr id="18" name="Text 14"/>
-          <p:cNvSpPr txBox="1"/>
-          <p:nvPr/>
-        </p:nvSpPr>
-        <p:spPr>
-          <a:xfrm>
-            <a:off x="640080" y="3977640"/>
-            <a:ext cx="7863840" cy="731520"/>
-          </a:xfrm>
-          <a:prstGeom prst="rect">
-            <a:avLst/>
-          </a:prstGeom>
-          <a:noFill/>
-          <a:ln/>
-        </p:spPr>
-        <p:txBody>
-          <a:bodyPr wrap="square" lIns="0" tIns="0" rIns="0" bIns="0" rtlCol="0" anchor="ctr"/>
-          <a:lstStyle/>
-          <a:p>
-            <a:pPr indent="0" marL="0">
-              <a:buNone/>
-            </a:pPr>
-            <a:r>
-              <a:rPr lang="en-US" sz="1200" b="1" dirty="0">
-                <a:solidFill>
-                  <a:srgbClr val="1B1B2F"/>
-                </a:solidFill>
-                <a:latin typeface="Calibri" pitchFamily="34" charset="0"/>
-                <a:ea typeface="Calibri" pitchFamily="34" charset="-122"/>
-                <a:cs typeface="Calibri" pitchFamily="34" charset="-120"/>
-              </a:rPr>
-              <a:t>Méthode : </a:t>
-            </a:r>
-            <a:pPr indent="0" marL="0">
-              <a:buNone/>
-            </a:pPr>
-            <a:r>
-              <a:rPr lang="en-US" sz="1200" dirty="0">
-                <a:solidFill>
-                  <a:srgbClr val="1B1B2F"/>
-                </a:solidFill>
-                <a:latin typeface="Calibri" pitchFamily="34" charset="0"/>
-                <a:ea typeface="Calibri" pitchFamily="34" charset="-122"/>
-                <a:cs typeface="Calibri" pitchFamily="34" charset="-120"/>
-              </a:rPr>
-              <a:t>scraping avec Apify, transcription avec Whisper, classification testée avec Jev (TypeSafe) puis faite avec Claude, et vérifiée à la main. </a:t>
-            </a:r>
-            <a:pPr indent="0" marL="0">
-              <a:buNone/>
-            </a:pPr>
-            <a:r>
-              <a:rPr lang="en-US" sz="1200" b="1" dirty="0">
-                <a:solidFill>
-                  <a:srgbClr val="EF4B4B"/>
-                </a:solidFill>
-                <a:latin typeface="Calibri" pitchFamily="34" charset="0"/>
-                <a:ea typeface="Calibri" pitchFamily="34" charset="-122"/>
-                <a:cs typeface="Calibri" pitchFamily="34" charset="-120"/>
-              </a:rPr>
-              <a:t>Les données sont ici : [lien Google Sheet]</a:t>
-            </a:r>
-            <a:endParaRPr lang="en-US" sz="1200" dirty="0"/>
-          </a:p>
-        </p:txBody>
-      </p:sp>
     </p:spTree>
   </p:cSld>
   <p:clrMapOvr>

--- a/deck/10pourcent_report.pptx
+++ b/deck/10pourcent_report.pptx
@@ -2292,7 +2292,7 @@
                 <a:ea typeface="Poppins" pitchFamily="34" charset="-122"/>
                 <a:cs typeface="Poppins" pitchFamily="34" charset="-120"/>
               </a:rPr>
-              <a:t>J'ai récupéré toutes les pubs actives de 10%, Joko et Ibotta, soit 335 pubs. J'ai transcrit les vidéos et classé chaque pub par hook, angle, niveau de conscience et format.</a:t>
+              <a:t>J'ai récupéré toutes les pubs actives de 10%, Joko et Ibotta, soit 337 pubs. J'ai transcrit les vidéos et classé chaque pub par hook, angle, niveau de conscience et format.</a:t>
             </a:r>
             <a:endParaRPr lang="en-US" sz="1250" dirty="0"/>
           </a:p>
